--- a/docs/Service-Desk-Command-Center.pptx
+++ b/docs/Service-Desk-Command-Center.pptx
@@ -115,6 +115,331 @@
     </a:lvl9pPr>
   </p:defaultTextStyle>
 </p:presentation>
+</file>
+
+<file path=ppt/charts/chart1.xml><?xml version="1.0" encoding="utf-8"?>
+<c:chartSpace xmlns:c="http://schemas.openxmlformats.org/drawingml/2006/chart" xmlns:a="http://schemas.openxmlformats.org/drawingml/2006/main" xmlns:r="http://schemas.openxmlformats.org/officeDocument/2006/relationships">
+  <c:date1904 val="0"/>
+  <c:roundedCorners val="1"/>
+  <c:chart>
+    <c:title>
+      <c:tx>
+        <c:rich>
+          <a:bodyPr/>
+          <a:lstStyle/>
+          <a:p>
+            <a:pPr>
+              <a:defRPr sz="1300" b="0" i="0" u="none" strike="noStrike">
+                <a:solidFill>
+                  <a:srgbClr val="141A42"/>
+                </a:solidFill>
+                <a:latin typeface="Calibri"/>
+              </a:defRPr>
+            </a:pPr>
+            <a:r>
+              <a:rPr sz="1300" b="0" i="0" u="none" strike="noStrike">
+                <a:solidFill>
+                  <a:srgbClr val="141A42"/>
+                </a:solidFill>
+                <a:latin typeface="Calibri"/>
+              </a:rPr>
+              <a:t>The five heaviest classes</a:t>
+            </a:r>
+          </a:p>
+        </c:rich>
+      </c:tx>
+      <c:layout/>
+      <c:overlay val="0"/>
+    </c:title>
+    <c:autoTitleDeleted val="0"/>
+    <c:plotArea>
+      <c:layout/>
+      <c:barChart>
+        <c:barDir val="bar"/>
+        <c:grouping val="clustered"/>
+        <c:varyColors val="0"/>
+        <c:ser>
+          <c:idx val="0"/>
+          <c:order val="0"/>
+          <c:tx>
+            <c:strRef>
+              <c:f>Sheet1!$B$1</c:f>
+              <c:strCache>
+                <c:ptCount val="1"/>
+                <c:pt idx="0">
+                  <c:v>Tickets</c:v>
+                </c:pt>
+              </c:strCache>
+            </c:strRef>
+          </c:tx>
+          <c:spPr>
+            <a:solidFill>
+              <a:srgbClr val="141A42"/>
+            </a:solidFill>
+            <a:effectLst/>
+          </c:spPr>
+          <c:invertIfNegative val="0"/>
+          <c:dLbls>
+            <c:numFmt formatCode="#,##0" sourceLinked="0"/>
+            <c:txPr>
+              <a:bodyPr/>
+              <a:lstStyle/>
+              <a:p>
+                <a:pPr>
+                  <a:defRPr b="0" i="0" strike="noStrike" sz="1100" u="none">
+                    <a:solidFill>
+                      <a:srgbClr val="6B7391"/>
+                    </a:solidFill>
+                    <a:latin typeface="Calibri"/>
+                  </a:defRPr>
+                </a:pPr>
+              </a:p>
+            </c:txPr>
+            <c:showLegendKey val="0"/>
+            <c:showVal val="1"/>
+            <c:showCatName val="0"/>
+            <c:showSerName val="0"/>
+            <c:showPercent val="0"/>
+            <c:showBubbleSize val="0"/>
+            <c:showLeaderLines val="0"/>
+          </c:dLbls>
+          <c:dPt>
+            <c:idx val="0"/>
+            <c:invertIfNegative val="0"/>
+            <c:bubble3D val="0"/>
+            <c:spPr>
+              <a:solidFill>
+                <a:srgbClr val="141A42"/>
+              </a:solidFill>
+              <a:effectLst/>
+            </c:spPr>
+          </c:dPt>
+          <c:dPt>
+            <c:idx val="1"/>
+            <c:invertIfNegative val="0"/>
+            <c:bubble3D val="0"/>
+            <c:spPr>
+              <a:solidFill>
+                <a:srgbClr val="5A64A3"/>
+              </a:solidFill>
+              <a:effectLst/>
+            </c:spPr>
+          </c:dPt>
+          <c:dPt>
+            <c:idx val="2"/>
+            <c:invertIfNegative val="0"/>
+            <c:bubble3D val="0"/>
+            <c:spPr>
+              <a:solidFill>
+                <a:srgbClr val="8AA2DF"/>
+              </a:solidFill>
+              <a:effectLst/>
+            </c:spPr>
+          </c:dPt>
+          <c:dPt>
+            <c:idx val="3"/>
+            <c:invertIfNegative val="0"/>
+            <c:bubble3D val="0"/>
+            <c:spPr>
+              <a:solidFill>
+                <a:srgbClr val="8AA2DF"/>
+              </a:solidFill>
+              <a:effectLst/>
+            </c:spPr>
+          </c:dPt>
+          <c:dPt>
+            <c:idx val="4"/>
+            <c:invertIfNegative val="0"/>
+            <c:bubble3D val="0"/>
+            <c:spPr>
+              <a:solidFill>
+                <a:srgbClr val="8AA2DF"/>
+              </a:solidFill>
+              <a:effectLst/>
+            </c:spPr>
+          </c:dPt>
+          <c:cat>
+            <c:multiLvlStrRef>
+              <c:f>Sheet1!$A$2:$A$6</c:f>
+              <c:multiLvlStrCache>
+                <c:ptCount val="5"/>
+                <c:lvl>
+                  <c:pt idx="0">
+                    <c:v>Shared drive</c:v>
+                  </c:pt>
+                  <c:pt idx="1">
+                    <c:v>Printers offline</c:v>
+                  </c:pt>
+                  <c:pt idx="2">
+                    <c:v>Mailbox quota</c:v>
+                  </c:pt>
+                  <c:pt idx="3">
+                    <c:v>Guest wifi</c:v>
+                  </c:pt>
+                  <c:pt idx="4">
+                    <c:v>Password resets</c:v>
+                  </c:pt>
+                </c:lvl>
+              </c:multiLvlStrCache>
+            </c:multiLvlStrRef>
+          </c:cat>
+          <c:val>
+            <c:numRef>
+              <c:f>Sheet1!$B$2:$B$6</c:f>
+              <c:numCache>
+                <c:formatCode>General</c:formatCode>
+                <c:ptCount val="5"/>
+                <c:pt idx="0">
+                  <c:v>44</c:v>
+                </c:pt>
+                <c:pt idx="1">
+                  <c:v>43</c:v>
+                </c:pt>
+                <c:pt idx="2">
+                  <c:v>43</c:v>
+                </c:pt>
+                <c:pt idx="3">
+                  <c:v>40</c:v>
+                </c:pt>
+                <c:pt idx="4">
+                  <c:v>37</c:v>
+                </c:pt>
+              </c:numCache>
+            </c:numRef>
+          </c:val>
+        </c:ser>
+        <c:dLbls>
+          <c:numFmt formatCode="#,##0" sourceLinked="0"/>
+          <c:txPr>
+            <a:bodyPr/>
+            <a:lstStyle/>
+            <a:p>
+              <a:pPr>
+                <a:defRPr b="0" i="0" strike="noStrike" sz="1100" u="none">
+                  <a:solidFill>
+                    <a:srgbClr val="6B7391"/>
+                  </a:solidFill>
+                  <a:latin typeface="Calibri"/>
+                </a:defRPr>
+              </a:pPr>
+            </a:p>
+          </c:txPr>
+          <c:showLegendKey val="0"/>
+          <c:showVal val="1"/>
+          <c:showCatName val="0"/>
+          <c:showSerName val="0"/>
+          <c:showPercent val="0"/>
+          <c:showBubbleSize val="0"/>
+          <c:showLeaderLines val="0"/>
+        </c:dLbls>
+        <c:gapWidth val="45"/>
+        <c:overlap val="0"/>
+        <c:axId val="2094734554"/>
+        <c:axId val="2094734552"/>
+        <c:axId val="2094734556"/>
+      </c:barChart>
+      <c:catAx>
+        <c:axId val="2094734554"/>
+        <c:scaling>
+          <c:orientation val="minMax"/>
+        </c:scaling>
+        <c:delete val="0"/>
+        <c:axPos val="l"/>
+        <c:numFmt formatCode="General" sourceLinked="1"/>
+        <c:majorTickMark val="out"/>
+        <c:minorTickMark val="none"/>
+        <c:tickLblPos val="nextTo"/>
+        <c:spPr>
+          <a:ln w="12700" cap="flat">
+            <a:solidFill>
+              <a:srgbClr val="888888"/>
+            </a:solidFill>
+            <a:prstDash val="solid"/>
+            <a:round/>
+          </a:ln>
+        </c:spPr>
+        <c:txPr>
+          <a:bodyPr/>
+          <a:lstStyle/>
+          <a:p>
+            <a:pPr>
+              <a:defRPr sz="1100" b="0" i="0" u="none" strike="noStrike">
+                <a:solidFill>
+                  <a:srgbClr val="141A42"/>
+                </a:solidFill>
+                <a:latin typeface="Calibri"/>
+              </a:defRPr>
+            </a:pPr>
+            <a:endParaRPr lang="en-US"/>
+          </a:p>
+        </c:txPr>
+        <c:crossAx val="2094734552"/>
+        <c:crosses val="autoZero"/>
+        <c:auto val="1"/>
+        <c:lblAlgn val="ctr"/>
+        <c:noMultiLvlLbl val="1"/>
+      </c:catAx>
+      <c:valAx>
+        <c:axId val="2094734552"/>
+        <c:scaling>
+          <c:orientation val="minMax"/>
+        </c:scaling>
+        <c:delete val="1"/>
+        <c:axPos val="b"/>
+        <c:numFmt formatCode="General" sourceLinked="0"/>
+        <c:majorTickMark val="out"/>
+        <c:minorTickMark val="none"/>
+        <c:tickLblPos val="low"/>
+        <c:spPr>
+          <a:ln w="12700" cap="flat">
+            <a:solidFill>
+              <a:srgbClr val="888888"/>
+            </a:solidFill>
+            <a:prstDash val="solid"/>
+            <a:round/>
+          </a:ln>
+        </c:spPr>
+        <c:txPr>
+          <a:bodyPr/>
+          <a:lstStyle/>
+          <a:p>
+            <a:pPr>
+              <a:defRPr sz="1200" b="0" i="0" u="none" strike="noStrike">
+                <a:solidFill>
+                  <a:srgbClr val="000000"/>
+                </a:solidFill>
+                <a:latin typeface="Arial"/>
+              </a:defRPr>
+            </a:pPr>
+            <a:endParaRPr lang="en-US"/>
+          </a:p>
+        </c:txPr>
+        <c:crossAx val="2094734554"/>
+        <c:crosses val="autoZero"/>
+        <c:crossBetween val="between"/>
+      </c:valAx>
+      <c:spPr>
+        <a:noFill/>
+        <a:ln>
+          <a:noFill/>
+        </a:ln>
+        <a:effectLst/>
+      </c:spPr>
+    </c:plotArea>
+    <c:plotVisOnly val="1"/>
+    <c:dispBlanksAs val="span"/>
+  </c:chart>
+  <c:spPr>
+    <a:noFill/>
+    <a:ln>
+      <a:noFill/>
+    </a:ln>
+    <a:effectLst/>
+  </c:spPr>
+  <c:externalData r:id="rId1">
+    <c:autoUpdate val="0"/>
+  </c:externalData>
+</c:chartSpace>
 </file>
 
 <file path=ppt/notesMasters/notesMaster1.xml><?xml version="1.0" encoding="utf-8"?>
@@ -1765,16 +2090,66 @@
           <a:chExt cx="0" cy="0"/>
         </a:xfrm>
       </p:grpSpPr>
-      <p:sp>
-        <p:nvSpPr>
-          <p:cNvPr id="2" name="Text 0"/>
-          <p:cNvSpPr/>
-          <p:nvPr/>
-        </p:nvSpPr>
-        <p:spPr>
-          <a:xfrm>
-            <a:off x="777240" y="566928"/>
-            <a:ext cx="10607040" cy="292608"/>
+      <p:pic>
+        <p:nvPicPr>
+          <p:cNvPr id="2" name="Image 0" descr="preencoded.png">    </p:cNvPr>
+          <p:cNvPicPr>
+            <a:picLocks noChangeAspect="1"/>
+          </p:cNvPicPr>
+          <p:nvPr/>
+        </p:nvPicPr>
+        <p:blipFill>
+          <a:blip r:embed="rId1">
+            <a:alphaModFix amt="8000"/>
+          </a:blip>
+          <a:stretch>
+            <a:fillRect/>
+          </a:stretch>
+        </p:blipFill>
+        <p:spPr>
+          <a:xfrm>
+            <a:off x="9966960" y="4297680"/>
+            <a:ext cx="3291840" cy="3291840"/>
+          </a:xfrm>
+          <a:prstGeom prst="rect">
+            <a:avLst/>
+          </a:prstGeom>
+        </p:spPr>
+      </p:pic>
+      <p:pic>
+        <p:nvPicPr>
+          <p:cNvPr id="3" name="Image 1" descr="preencoded.png">    </p:cNvPr>
+          <p:cNvPicPr>
+            <a:picLocks noChangeAspect="1"/>
+          </p:cNvPicPr>
+          <p:nvPr/>
+        </p:nvPicPr>
+        <p:blipFill>
+          <a:blip r:embed="rId2"/>
+          <a:stretch>
+            <a:fillRect/>
+          </a:stretch>
+        </p:blipFill>
+        <p:spPr>
+          <a:xfrm>
+            <a:off x="777240" y="502920"/>
+            <a:ext cx="2286000" cy="603504"/>
+          </a:xfrm>
+          <a:prstGeom prst="rect">
+            <a:avLst/>
+          </a:prstGeom>
+        </p:spPr>
+      </p:pic>
+      <p:sp>
+        <p:nvSpPr>
+          <p:cNvPr id="4" name="Text 0"/>
+          <p:cNvSpPr/>
+          <p:nvPr/>
+        </p:nvSpPr>
+        <p:spPr>
+          <a:xfrm>
+            <a:off x="777240" y="1325880"/>
+            <a:ext cx="10607040" cy="274320"/>
           </a:xfrm>
           <a:prstGeom prst="rect">
             <a:avLst/>
@@ -1806,14 +2181,14 @@
       </p:sp>
       <p:sp>
         <p:nvSpPr>
-          <p:cNvPr id="3" name="Text 1"/>
-          <p:cNvSpPr/>
-          <p:nvPr/>
-        </p:nvSpPr>
-        <p:spPr>
-          <a:xfrm>
-            <a:off x="777240" y="1371600"/>
-            <a:ext cx="10607040" cy="2194560"/>
+          <p:cNvPr id="5" name="Text 1"/>
+          <p:cNvSpPr/>
+          <p:nvPr/>
+        </p:nvSpPr>
+        <p:spPr>
+          <a:xfrm>
+            <a:off x="777240" y="1783080"/>
+            <a:ext cx="10424160" cy="2103120"/>
           </a:xfrm>
           <a:prstGeom prst="rect">
             <a:avLst/>
@@ -1868,13 +2243,13 @@
       </p:sp>
       <p:sp>
         <p:nvSpPr>
-          <p:cNvPr id="4" name="Text 2"/>
-          <p:cNvSpPr/>
-          <p:nvPr/>
-        </p:nvSpPr>
-        <p:spPr>
-          <a:xfrm>
-            <a:off x="777240" y="3703320"/>
+          <p:cNvPr id="6" name="Text 2"/>
+          <p:cNvSpPr/>
+          <p:nvPr/>
+        </p:nvSpPr>
+        <p:spPr>
+          <a:xfrm>
+            <a:off x="777240" y="3977640"/>
             <a:ext cx="8046720" cy="457200"/>
           </a:xfrm>
           <a:prstGeom prst="rect">
@@ -1907,13 +2282,13 @@
       </p:sp>
       <p:sp>
         <p:nvSpPr>
-          <p:cNvPr id="5" name="Text 3"/>
-          <p:cNvSpPr/>
-          <p:nvPr/>
-        </p:nvSpPr>
-        <p:spPr>
-          <a:xfrm>
-            <a:off x="777240" y="4480560"/>
+          <p:cNvPr id="7" name="Text 3"/>
+          <p:cNvSpPr/>
+          <p:nvPr/>
+        </p:nvSpPr>
+        <p:spPr>
+          <a:xfrm>
+            <a:off x="777240" y="4754880"/>
             <a:ext cx="2880360" cy="914400"/>
           </a:xfrm>
           <a:prstGeom prst="rect">
@@ -1946,13 +2321,13 @@
       </p:sp>
       <p:sp>
         <p:nvSpPr>
-          <p:cNvPr id="6" name="Text 4"/>
-          <p:cNvSpPr/>
-          <p:nvPr/>
-        </p:nvSpPr>
-        <p:spPr>
-          <a:xfrm>
-            <a:off x="777240" y="5349240"/>
+          <p:cNvPr id="8" name="Text 4"/>
+          <p:cNvSpPr/>
+          <p:nvPr/>
+        </p:nvSpPr>
+        <p:spPr>
+          <a:xfrm>
+            <a:off x="777240" y="5623560"/>
             <a:ext cx="2880360" cy="566928"/>
           </a:xfrm>
           <a:prstGeom prst="rect">
@@ -1985,13 +2360,13 @@
       </p:sp>
       <p:sp>
         <p:nvSpPr>
-          <p:cNvPr id="8" name="Text 5"/>
-          <p:cNvSpPr/>
-          <p:nvPr/>
-        </p:nvSpPr>
-        <p:spPr>
-          <a:xfrm>
-            <a:off x="11155680" y="6172200"/>
+          <p:cNvPr id="10" name="Text 5"/>
+          <p:cNvSpPr/>
+          <p:nvPr/>
+        </p:nvSpPr>
+        <p:spPr>
+          <a:xfrm>
+            <a:off x="11247120" y="6263640"/>
             <a:ext cx="457200" cy="274320"/>
           </a:xfrm>
           <a:prstGeom prst="rect">
@@ -2054,9 +2429,35 @@
           <a:chExt cx="0" cy="0"/>
         </a:xfrm>
       </p:grpSpPr>
-      <p:sp>
-        <p:nvSpPr>
-          <p:cNvPr id="2" name="Text 0"/>
+      <p:pic>
+        <p:nvPicPr>
+          <p:cNvPr id="2" name="Image 0" descr="preencoded.png">    </p:cNvPr>
+          <p:cNvPicPr>
+            <a:picLocks noChangeAspect="1"/>
+          </p:cNvPicPr>
+          <p:nvPr/>
+        </p:nvPicPr>
+        <p:blipFill>
+          <a:blip r:embed="rId1">
+            <a:alphaModFix amt="5000"/>
+          </a:blip>
+          <a:stretch>
+            <a:fillRect/>
+          </a:stretch>
+        </p:blipFill>
+        <p:spPr>
+          <a:xfrm>
+            <a:off x="9966960" y="4297680"/>
+            <a:ext cx="3291840" cy="3291840"/>
+          </a:xfrm>
+          <a:prstGeom prst="rect">
+            <a:avLst/>
+          </a:prstGeom>
+        </p:spPr>
+      </p:pic>
+      <p:sp>
+        <p:nvSpPr>
+          <p:cNvPr id="3" name="Text 0"/>
           <p:cNvSpPr/>
           <p:nvPr/>
         </p:nvSpPr>
@@ -2095,14 +2496,14 @@
       </p:sp>
       <p:sp>
         <p:nvSpPr>
-          <p:cNvPr id="3" name="Text 1"/>
+          <p:cNvPr id="4" name="Text 1"/>
           <p:cNvSpPr/>
           <p:nvPr/>
         </p:nvSpPr>
         <p:spPr>
           <a:xfrm>
             <a:off x="777240" y="1051560"/>
-            <a:ext cx="10607040" cy="1737360"/>
+            <a:ext cx="10424160" cy="1737360"/>
           </a:xfrm>
           <a:prstGeom prst="rect">
             <a:avLst/>
@@ -2157,14 +2558,14 @@
       </p:sp>
       <p:sp>
         <p:nvSpPr>
-          <p:cNvPr id="4" name="Shape 2"/>
-          <p:cNvSpPr/>
-          <p:nvPr/>
-        </p:nvSpPr>
-        <p:spPr>
-          <a:xfrm>
-            <a:off x="777240" y="3099816"/>
-            <a:ext cx="182880" cy="182880"/>
+          <p:cNvPr id="5" name="Shape 2"/>
+          <p:cNvSpPr/>
+          <p:nvPr/>
+        </p:nvSpPr>
+        <p:spPr>
+          <a:xfrm>
+            <a:off x="777240" y="3008376"/>
+            <a:ext cx="310896" cy="310896"/>
           </a:xfrm>
           <a:prstGeom prst="ellipse">
             <a:avLst/>
@@ -2182,14 +2583,14 @@
       </p:sp>
       <p:sp>
         <p:nvSpPr>
-          <p:cNvPr id="5" name="Text 3"/>
-          <p:cNvSpPr/>
-          <p:nvPr/>
-        </p:nvSpPr>
-        <p:spPr>
-          <a:xfrm>
-            <a:off x="1161288" y="3017520"/>
-            <a:ext cx="9509760" cy="365760"/>
+          <p:cNvPr id="6" name="Text 3"/>
+          <p:cNvSpPr/>
+          <p:nvPr/>
+        </p:nvSpPr>
+        <p:spPr>
+          <a:xfrm>
+            <a:off x="777240" y="3008376"/>
+            <a:ext cx="310896" cy="310896"/>
           </a:xfrm>
           <a:prstGeom prst="rect">
             <a:avLst/>
@@ -2201,6 +2602,45 @@
           <a:bodyPr wrap="square" lIns="0" tIns="0" rIns="0" bIns="0" rtlCol="0" anchor="ctr"/>
           <a:lstStyle/>
           <a:p>
+            <a:pPr algn="ctr" indent="0" marL="0">
+              <a:buNone/>
+            </a:pPr>
+            <a:r>
+              <a:rPr lang="en-US" sz="1100" b="1" dirty="0">
+                <a:solidFill>
+                  <a:srgbClr val="141A42"/>
+                </a:solidFill>
+                <a:latin typeface="Calibri" pitchFamily="34" charset="0"/>
+                <a:ea typeface="Calibri" pitchFamily="34" charset="-122"/>
+                <a:cs typeface="Calibri" pitchFamily="34" charset="-120"/>
+              </a:rPr>
+              <a:t>1</a:t>
+            </a:r>
+            <a:endParaRPr lang="en-US" sz="1100" dirty="0"/>
+          </a:p>
+        </p:txBody>
+      </p:sp>
+      <p:sp>
+        <p:nvSpPr>
+          <p:cNvPr id="7" name="Text 4"/>
+          <p:cNvSpPr/>
+          <p:nvPr/>
+        </p:nvSpPr>
+        <p:spPr>
+          <a:xfrm>
+            <a:off x="1307592" y="2990088"/>
+            <a:ext cx="9326880" cy="365760"/>
+          </a:xfrm>
+          <a:prstGeom prst="rect">
+            <a:avLst/>
+          </a:prstGeom>
+          <a:noFill/>
+          <a:ln/>
+        </p:spPr>
+        <p:txBody>
+          <a:bodyPr wrap="square" lIns="0" tIns="0" rIns="0" bIns="0" rtlCol="0" anchor="ctr"/>
+          <a:lstStyle/>
+          <a:p>
             <a:pPr indent="0" marL="0">
               <a:buNone/>
             </a:pPr>
@@ -2213,7 +2653,7 @@
                 <a:ea typeface="Calibri" pitchFamily="34" charset="-122"/>
                 <a:cs typeface="Calibri" pitchFamily="34" charset="-120"/>
               </a:rPr>
-              <a:t>Elimination Backlog  </a:t>
+              <a:t>Elimination Backlog   </a:t>
             </a:r>
             <a:pPr indent="0" marL="0">
               <a:buNone/>
@@ -2235,14 +2675,14 @@
       </p:sp>
       <p:sp>
         <p:nvSpPr>
-          <p:cNvPr id="6" name="Shape 4"/>
-          <p:cNvSpPr/>
-          <p:nvPr/>
-        </p:nvSpPr>
-        <p:spPr>
-          <a:xfrm>
-            <a:off x="777240" y="3703320"/>
-            <a:ext cx="182880" cy="182880"/>
+          <p:cNvPr id="8" name="Shape 5"/>
+          <p:cNvSpPr/>
+          <p:nvPr/>
+        </p:nvSpPr>
+        <p:spPr>
+          <a:xfrm>
+            <a:off x="777240" y="3666744"/>
+            <a:ext cx="310896" cy="310896"/>
           </a:xfrm>
           <a:prstGeom prst="ellipse">
             <a:avLst/>
@@ -2260,14 +2700,14 @@
       </p:sp>
       <p:sp>
         <p:nvSpPr>
-          <p:cNvPr id="7" name="Text 5"/>
-          <p:cNvSpPr/>
-          <p:nvPr/>
-        </p:nvSpPr>
-        <p:spPr>
-          <a:xfrm>
-            <a:off x="1161288" y="3621024"/>
-            <a:ext cx="9509760" cy="365760"/>
+          <p:cNvPr id="9" name="Text 6"/>
+          <p:cNvSpPr/>
+          <p:nvPr/>
+        </p:nvSpPr>
+        <p:spPr>
+          <a:xfrm>
+            <a:off x="777240" y="3666744"/>
+            <a:ext cx="310896" cy="310896"/>
           </a:xfrm>
           <a:prstGeom prst="rect">
             <a:avLst/>
@@ -2279,6 +2719,45 @@
           <a:bodyPr wrap="square" lIns="0" tIns="0" rIns="0" bIns="0" rtlCol="0" anchor="ctr"/>
           <a:lstStyle/>
           <a:p>
+            <a:pPr algn="ctr" indent="0" marL="0">
+              <a:buNone/>
+            </a:pPr>
+            <a:r>
+              <a:rPr lang="en-US" sz="1100" b="1" dirty="0">
+                <a:solidFill>
+                  <a:srgbClr val="141A42"/>
+                </a:solidFill>
+                <a:latin typeface="Calibri" pitchFamily="34" charset="0"/>
+                <a:ea typeface="Calibri" pitchFamily="34" charset="-122"/>
+                <a:cs typeface="Calibri" pitchFamily="34" charset="-120"/>
+              </a:rPr>
+              <a:t>2</a:t>
+            </a:r>
+            <a:endParaRPr lang="en-US" sz="1100" dirty="0"/>
+          </a:p>
+        </p:txBody>
+      </p:sp>
+      <p:sp>
+        <p:nvSpPr>
+          <p:cNvPr id="10" name="Text 7"/>
+          <p:cNvSpPr/>
+          <p:nvPr/>
+        </p:nvSpPr>
+        <p:spPr>
+          <a:xfrm>
+            <a:off x="1307592" y="3648456"/>
+            <a:ext cx="9326880" cy="365760"/>
+          </a:xfrm>
+          <a:prstGeom prst="rect">
+            <a:avLst/>
+          </a:prstGeom>
+          <a:noFill/>
+          <a:ln/>
+        </p:spPr>
+        <p:txBody>
+          <a:bodyPr wrap="square" lIns="0" tIns="0" rIns="0" bIns="0" rtlCol="0" anchor="ctr"/>
+          <a:lstStyle/>
+          <a:p>
             <a:pPr indent="0" marL="0">
               <a:buNone/>
             </a:pPr>
@@ -2291,7 +2770,7 @@
                 <a:ea typeface="Calibri" pitchFamily="34" charset="-122"/>
                 <a:cs typeface="Calibri" pitchFamily="34" charset="-120"/>
               </a:rPr>
-              <a:t>Agent timeline  </a:t>
+              <a:t>Agent timeline   </a:t>
             </a:r>
             <a:pPr indent="0" marL="0">
               <a:buNone/>
@@ -2313,14 +2792,14 @@
       </p:sp>
       <p:sp>
         <p:nvSpPr>
-          <p:cNvPr id="8" name="Shape 6"/>
-          <p:cNvSpPr/>
-          <p:nvPr/>
-        </p:nvSpPr>
-        <p:spPr>
-          <a:xfrm>
-            <a:off x="777240" y="4306824"/>
-            <a:ext cx="182880" cy="182880"/>
+          <p:cNvPr id="11" name="Shape 8"/>
+          <p:cNvSpPr/>
+          <p:nvPr/>
+        </p:nvSpPr>
+        <p:spPr>
+          <a:xfrm>
+            <a:off x="777240" y="4325112"/>
+            <a:ext cx="310896" cy="310896"/>
           </a:xfrm>
           <a:prstGeom prst="ellipse">
             <a:avLst/>
@@ -2338,14 +2817,14 @@
       </p:sp>
       <p:sp>
         <p:nvSpPr>
-          <p:cNvPr id="9" name="Text 7"/>
-          <p:cNvSpPr/>
-          <p:nvPr/>
-        </p:nvSpPr>
-        <p:spPr>
-          <a:xfrm>
-            <a:off x="1161288" y="4224528"/>
-            <a:ext cx="9509760" cy="365760"/>
+          <p:cNvPr id="12" name="Text 9"/>
+          <p:cNvSpPr/>
+          <p:nvPr/>
+        </p:nvSpPr>
+        <p:spPr>
+          <a:xfrm>
+            <a:off x="777240" y="4325112"/>
+            <a:ext cx="310896" cy="310896"/>
           </a:xfrm>
           <a:prstGeom prst="rect">
             <a:avLst/>
@@ -2357,6 +2836,45 @@
           <a:bodyPr wrap="square" lIns="0" tIns="0" rIns="0" bIns="0" rtlCol="0" anchor="ctr"/>
           <a:lstStyle/>
           <a:p>
+            <a:pPr algn="ctr" indent="0" marL="0">
+              <a:buNone/>
+            </a:pPr>
+            <a:r>
+              <a:rPr lang="en-US" sz="1100" b="1" dirty="0">
+                <a:solidFill>
+                  <a:srgbClr val="141A42"/>
+                </a:solidFill>
+                <a:latin typeface="Calibri" pitchFamily="34" charset="0"/>
+                <a:ea typeface="Calibri" pitchFamily="34" charset="-122"/>
+                <a:cs typeface="Calibri" pitchFamily="34" charset="-120"/>
+              </a:rPr>
+              <a:t>3</a:t>
+            </a:r>
+            <a:endParaRPr lang="en-US" sz="1100" dirty="0"/>
+          </a:p>
+        </p:txBody>
+      </p:sp>
+      <p:sp>
+        <p:nvSpPr>
+          <p:cNvPr id="13" name="Text 10"/>
+          <p:cNvSpPr/>
+          <p:nvPr/>
+        </p:nvSpPr>
+        <p:spPr>
+          <a:xfrm>
+            <a:off x="1307592" y="4306824"/>
+            <a:ext cx="9326880" cy="365760"/>
+          </a:xfrm>
+          <a:prstGeom prst="rect">
+            <a:avLst/>
+          </a:prstGeom>
+          <a:noFill/>
+          <a:ln/>
+        </p:spPr>
+        <p:txBody>
+          <a:bodyPr wrap="square" lIns="0" tIns="0" rIns="0" bIns="0" rtlCol="0" anchor="ctr"/>
+          <a:lstStyle/>
+          <a:p>
             <a:pPr indent="0" marL="0">
               <a:buNone/>
             </a:pPr>
@@ -2369,7 +2887,7 @@
                 <a:ea typeface="Calibri" pitchFamily="34" charset="-122"/>
                 <a:cs typeface="Calibri" pitchFamily="34" charset="-120"/>
               </a:rPr>
-              <a:t>Policies  </a:t>
+              <a:t>Policies   </a:t>
             </a:r>
             <a:pPr indent="0" marL="0">
               <a:buNone/>
@@ -2391,14 +2909,14 @@
       </p:sp>
       <p:sp>
         <p:nvSpPr>
-          <p:cNvPr id="10" name="Shape 8"/>
-          <p:cNvSpPr/>
-          <p:nvPr/>
-        </p:nvSpPr>
-        <p:spPr>
-          <a:xfrm>
-            <a:off x="777240" y="4910328"/>
-            <a:ext cx="182880" cy="182880"/>
+          <p:cNvPr id="14" name="Shape 11"/>
+          <p:cNvSpPr/>
+          <p:nvPr/>
+        </p:nvSpPr>
+        <p:spPr>
+          <a:xfrm>
+            <a:off x="777240" y="4983480"/>
+            <a:ext cx="310896" cy="310896"/>
           </a:xfrm>
           <a:prstGeom prst="ellipse">
             <a:avLst/>
@@ -2416,14 +2934,14 @@
       </p:sp>
       <p:sp>
         <p:nvSpPr>
-          <p:cNvPr id="11" name="Text 9"/>
-          <p:cNvSpPr/>
-          <p:nvPr/>
-        </p:nvSpPr>
-        <p:spPr>
-          <a:xfrm>
-            <a:off x="1161288" y="4828032"/>
-            <a:ext cx="9509760" cy="365760"/>
+          <p:cNvPr id="15" name="Text 12"/>
+          <p:cNvSpPr/>
+          <p:nvPr/>
+        </p:nvSpPr>
+        <p:spPr>
+          <a:xfrm>
+            <a:off x="777240" y="4983480"/>
+            <a:ext cx="310896" cy="310896"/>
           </a:xfrm>
           <a:prstGeom prst="rect">
             <a:avLst/>
@@ -2435,6 +2953,45 @@
           <a:bodyPr wrap="square" lIns="0" tIns="0" rIns="0" bIns="0" rtlCol="0" anchor="ctr"/>
           <a:lstStyle/>
           <a:p>
+            <a:pPr algn="ctr" indent="0" marL="0">
+              <a:buNone/>
+            </a:pPr>
+            <a:r>
+              <a:rPr lang="en-US" sz="1100" b="1" dirty="0">
+                <a:solidFill>
+                  <a:srgbClr val="141A42"/>
+                </a:solidFill>
+                <a:latin typeface="Calibri" pitchFamily="34" charset="0"/>
+                <a:ea typeface="Calibri" pitchFamily="34" charset="-122"/>
+                <a:cs typeface="Calibri" pitchFamily="34" charset="-120"/>
+              </a:rPr>
+              <a:t>4</a:t>
+            </a:r>
+            <a:endParaRPr lang="en-US" sz="1100" dirty="0"/>
+          </a:p>
+        </p:txBody>
+      </p:sp>
+      <p:sp>
+        <p:nvSpPr>
+          <p:cNvPr id="16" name="Text 13"/>
+          <p:cNvSpPr/>
+          <p:nvPr/>
+        </p:nvSpPr>
+        <p:spPr>
+          <a:xfrm>
+            <a:off x="1307592" y="4965192"/>
+            <a:ext cx="9326880" cy="365760"/>
+          </a:xfrm>
+          <a:prstGeom prst="rect">
+            <a:avLst/>
+          </a:prstGeom>
+          <a:noFill/>
+          <a:ln/>
+        </p:spPr>
+        <p:txBody>
+          <a:bodyPr wrap="square" lIns="0" tIns="0" rIns="0" bIns="0" rtlCol="0" anchor="ctr"/>
+          <a:lstStyle/>
+          <a:p>
             <a:pPr indent="0" marL="0">
               <a:buNone/>
             </a:pPr>
@@ -2447,7 +3004,7 @@
                 <a:ea typeface="Calibri" pitchFamily="34" charset="-122"/>
                 <a:cs typeface="Calibri" pitchFamily="34" charset="-120"/>
               </a:rPr>
-              <a:t>Workbench  </a:t>
+              <a:t>Workbench   </a:t>
             </a:r>
             <a:pPr indent="0" marL="0">
               <a:buNone/>
@@ -2469,14 +3026,14 @@
       </p:sp>
       <p:sp>
         <p:nvSpPr>
-          <p:cNvPr id="12" name="Shape 10"/>
-          <p:cNvSpPr/>
-          <p:nvPr/>
-        </p:nvSpPr>
-        <p:spPr>
-          <a:xfrm>
-            <a:off x="777240" y="5513832"/>
-            <a:ext cx="182880" cy="182880"/>
+          <p:cNvPr id="17" name="Shape 14"/>
+          <p:cNvSpPr/>
+          <p:nvPr/>
+        </p:nvSpPr>
+        <p:spPr>
+          <a:xfrm>
+            <a:off x="777240" y="5641848"/>
+            <a:ext cx="310896" cy="310896"/>
           </a:xfrm>
           <a:prstGeom prst="ellipse">
             <a:avLst/>
@@ -2494,14 +3051,14 @@
       </p:sp>
       <p:sp>
         <p:nvSpPr>
-          <p:cNvPr id="13" name="Text 11"/>
-          <p:cNvSpPr/>
-          <p:nvPr/>
-        </p:nvSpPr>
-        <p:spPr>
-          <a:xfrm>
-            <a:off x="1161288" y="5431536"/>
-            <a:ext cx="9509760" cy="365760"/>
+          <p:cNvPr id="18" name="Text 15"/>
+          <p:cNvSpPr/>
+          <p:nvPr/>
+        </p:nvSpPr>
+        <p:spPr>
+          <a:xfrm>
+            <a:off x="777240" y="5641848"/>
+            <a:ext cx="310896" cy="310896"/>
           </a:xfrm>
           <a:prstGeom prst="rect">
             <a:avLst/>
@@ -2513,6 +3070,45 @@
           <a:bodyPr wrap="square" lIns="0" tIns="0" rIns="0" bIns="0" rtlCol="0" anchor="ctr"/>
           <a:lstStyle/>
           <a:p>
+            <a:pPr algn="ctr" indent="0" marL="0">
+              <a:buNone/>
+            </a:pPr>
+            <a:r>
+              <a:rPr lang="en-US" sz="1100" b="1" dirty="0">
+                <a:solidFill>
+                  <a:srgbClr val="141A42"/>
+                </a:solidFill>
+                <a:latin typeface="Calibri" pitchFamily="34" charset="0"/>
+                <a:ea typeface="Calibri" pitchFamily="34" charset="-122"/>
+                <a:cs typeface="Calibri" pitchFamily="34" charset="-120"/>
+              </a:rPr>
+              <a:t>5</a:t>
+            </a:r>
+            <a:endParaRPr lang="en-US" sz="1100" dirty="0"/>
+          </a:p>
+        </p:txBody>
+      </p:sp>
+      <p:sp>
+        <p:nvSpPr>
+          <p:cNvPr id="19" name="Text 16"/>
+          <p:cNvSpPr/>
+          <p:nvPr/>
+        </p:nvSpPr>
+        <p:spPr>
+          <a:xfrm>
+            <a:off x="1307592" y="5623560"/>
+            <a:ext cx="9326880" cy="365760"/>
+          </a:xfrm>
+          <a:prstGeom prst="rect">
+            <a:avLst/>
+          </a:prstGeom>
+          <a:noFill/>
+          <a:ln/>
+        </p:spPr>
+        <p:txBody>
+          <a:bodyPr wrap="square" lIns="0" tIns="0" rIns="0" bIns="0" rtlCol="0" anchor="ctr"/>
+          <a:lstStyle/>
+          <a:p>
             <a:pPr indent="0" marL="0">
               <a:buNone/>
             </a:pPr>
@@ -2525,7 +3121,7 @@
                 <a:ea typeface="Calibri" pitchFamily="34" charset="-122"/>
                 <a:cs typeface="Calibri" pitchFamily="34" charset="-120"/>
               </a:rPr>
-              <a:t>Insights &amp; Data Manager  </a:t>
+              <a:t>Insights &amp; Data Manager   </a:t>
             </a:r>
             <a:pPr indent="0" marL="0">
               <a:buNone/>
@@ -2547,13 +3143,13 @@
       </p:sp>
       <p:sp>
         <p:nvSpPr>
-          <p:cNvPr id="15" name="Text 12"/>
-          <p:cNvSpPr/>
-          <p:nvPr/>
-        </p:nvSpPr>
-        <p:spPr>
-          <a:xfrm>
-            <a:off x="11155680" y="6172200"/>
+          <p:cNvPr id="21" name="Text 17"/>
+          <p:cNvSpPr/>
+          <p:nvPr/>
+        </p:nvSpPr>
+        <p:spPr>
+          <a:xfrm>
+            <a:off x="11247120" y="6263640"/>
             <a:ext cx="457200" cy="274320"/>
           </a:xfrm>
           <a:prstGeom prst="rect">
@@ -2616,16 +3212,66 @@
           <a:chExt cx="0" cy="0"/>
         </a:xfrm>
       </p:grpSpPr>
-      <p:sp>
-        <p:nvSpPr>
-          <p:cNvPr id="2" name="Text 0"/>
-          <p:cNvSpPr/>
-          <p:nvPr/>
-        </p:nvSpPr>
-        <p:spPr>
-          <a:xfrm>
-            <a:off x="777240" y="566928"/>
-            <a:ext cx="10607040" cy="292608"/>
+      <p:pic>
+        <p:nvPicPr>
+          <p:cNvPr id="2" name="Image 0" descr="preencoded.png">    </p:cNvPr>
+          <p:cNvPicPr>
+            <a:picLocks noChangeAspect="1"/>
+          </p:cNvPicPr>
+          <p:nvPr/>
+        </p:nvPicPr>
+        <p:blipFill>
+          <a:blip r:embed="rId1">
+            <a:alphaModFix amt="8000"/>
+          </a:blip>
+          <a:stretch>
+            <a:fillRect/>
+          </a:stretch>
+        </p:blipFill>
+        <p:spPr>
+          <a:xfrm>
+            <a:off x="9966960" y="4297680"/>
+            <a:ext cx="3291840" cy="3291840"/>
+          </a:xfrm>
+          <a:prstGeom prst="rect">
+            <a:avLst/>
+          </a:prstGeom>
+        </p:spPr>
+      </p:pic>
+      <p:pic>
+        <p:nvPicPr>
+          <p:cNvPr id="3" name="Image 1" descr="preencoded.png">    </p:cNvPr>
+          <p:cNvPicPr>
+            <a:picLocks noChangeAspect="1"/>
+          </p:cNvPicPr>
+          <p:nvPr/>
+        </p:nvPicPr>
+        <p:blipFill>
+          <a:blip r:embed="rId2"/>
+          <a:stretch>
+            <a:fillRect/>
+          </a:stretch>
+        </p:blipFill>
+        <p:spPr>
+          <a:xfrm>
+            <a:off x="777240" y="502920"/>
+            <a:ext cx="2286000" cy="603504"/>
+          </a:xfrm>
+          <a:prstGeom prst="rect">
+            <a:avLst/>
+          </a:prstGeom>
+        </p:spPr>
+      </p:pic>
+      <p:sp>
+        <p:nvSpPr>
+          <p:cNvPr id="4" name="Text 0"/>
+          <p:cNvSpPr/>
+          <p:nvPr/>
+        </p:nvSpPr>
+        <p:spPr>
+          <a:xfrm>
+            <a:off x="777240" y="1463040"/>
+            <a:ext cx="10424160" cy="274320"/>
           </a:xfrm>
           <a:prstGeom prst="rect">
             <a:avLst/>
@@ -2649,7 +3295,7 @@
                 <a:ea typeface="Calibri" pitchFamily="34" charset="-122"/>
                 <a:cs typeface="Calibri" pitchFamily="34" charset="-120"/>
               </a:rPr>
-              <a:t>IN CLOSING</a:t>
+              <a:t>AN AGENT THAT ACTS FAST IS EASY TO BUILD</a:t>
             </a:r>
             <a:endParaRPr lang="en-US" sz="1200" dirty="0"/>
           </a:p>
@@ -2657,14 +3303,96 @@
       </p:sp>
       <p:sp>
         <p:nvSpPr>
-          <p:cNvPr id="3" name="Text 1"/>
-          <p:cNvSpPr/>
-          <p:nvPr/>
-        </p:nvSpPr>
-        <p:spPr>
-          <a:xfrm>
-            <a:off x="777240" y="1234440"/>
-            <a:ext cx="10607040" cy="1645920"/>
+          <p:cNvPr id="5" name="Text 1"/>
+          <p:cNvSpPr/>
+          <p:nvPr/>
+        </p:nvSpPr>
+        <p:spPr>
+          <a:xfrm>
+            <a:off x="777240" y="1920240"/>
+            <a:ext cx="7863840" cy="2377440"/>
+          </a:xfrm>
+          <a:prstGeom prst="rect">
+            <a:avLst/>
+          </a:prstGeom>
+          <a:noFill/>
+          <a:ln/>
+        </p:spPr>
+        <p:txBody>
+          <a:bodyPr wrap="square" lIns="0" tIns="0" rIns="0" bIns="0" rtlCol="0" anchor="t"/>
+          <a:lstStyle/>
+          <a:p>
+            <a:pPr indent="0" marL="0">
+              <a:lnSpc>
+                <a:spcPts val="5200"/>
+              </a:lnSpc>
+              <a:buNone/>
+            </a:pPr>
+            <a:r>
+              <a:rPr lang="en-US" sz="4400" b="1" dirty="0">
+                <a:solidFill>
+                  <a:srgbClr val="FFFFFF"/>
+                </a:solidFill>
+                <a:latin typeface="Calibri" pitchFamily="34" charset="0"/>
+                <a:ea typeface="Calibri" pitchFamily="34" charset="-122"/>
+                <a:cs typeface="Calibri" pitchFamily="34" charset="-120"/>
+              </a:rPr>
+              <a:t>One that stops is</a:t>
+            </a:r>
+            <a:endParaRPr lang="en-US" sz="4400" dirty="0"/>
+          </a:p>
+          <a:p>
+            <a:pPr indent="0" marL="0">
+              <a:lnSpc>
+                <a:spcPts val="5200"/>
+              </a:lnSpc>
+              <a:buNone/>
+            </a:pPr>
+            <a:r>
+              <a:rPr lang="en-US" sz="4400" b="1" dirty="0">
+                <a:solidFill>
+                  <a:srgbClr val="FFFFFF"/>
+                </a:solidFill>
+                <a:latin typeface="Calibri" pitchFamily="34" charset="0"/>
+                <a:ea typeface="Calibri" pitchFamily="34" charset="-122"/>
+                <a:cs typeface="Calibri" pitchFamily="34" charset="-120"/>
+              </a:rPr>
+              <a:t>the one you would</a:t>
+            </a:r>
+            <a:endParaRPr lang="en-US" sz="4400" dirty="0"/>
+          </a:p>
+          <a:p>
+            <a:pPr indent="0" marL="0">
+              <a:lnSpc>
+                <a:spcPts val="5200"/>
+              </a:lnSpc>
+              <a:buNone/>
+            </a:pPr>
+            <a:r>
+              <a:rPr lang="en-US" sz="4400" b="1" dirty="0">
+                <a:solidFill>
+                  <a:srgbClr val="FFFFFF"/>
+                </a:solidFill>
+                <a:latin typeface="Calibri" pitchFamily="34" charset="0"/>
+                <a:ea typeface="Calibri" pitchFamily="34" charset="-122"/>
+                <a:cs typeface="Calibri" pitchFamily="34" charset="-120"/>
+              </a:rPr>
+              <a:t>actually deploy.</a:t>
+            </a:r>
+            <a:endParaRPr lang="en-US" sz="4400" dirty="0"/>
+          </a:p>
+        </p:txBody>
+      </p:sp>
+      <p:sp>
+        <p:nvSpPr>
+          <p:cNvPr id="6" name="Text 2"/>
+          <p:cNvSpPr/>
+          <p:nvPr/>
+        </p:nvSpPr>
+        <p:spPr>
+          <a:xfrm>
+            <a:off x="777240" y="4846320"/>
+            <a:ext cx="2880360" cy="914400"/>
           </a:xfrm>
           <a:prstGeom prst="rect">
             <a:avLst/>
@@ -2677,56 +3405,33 @@
           <a:lstStyle/>
           <a:p>
             <a:pPr indent="0" marL="0">
-              <a:lnSpc>
-                <a:spcPts val="5000"/>
-              </a:lnSpc>
-              <a:buNone/>
-            </a:pPr>
-            <a:r>
-              <a:rPr lang="en-US" sz="4200" b="1" dirty="0">
-                <a:solidFill>
-                  <a:srgbClr val="FFFFFF"/>
-                </a:solidFill>
-                <a:latin typeface="Calibri" pitchFamily="34" charset="0"/>
-                <a:ea typeface="Calibri" pitchFamily="34" charset="-122"/>
-                <a:cs typeface="Calibri" pitchFamily="34" charset="-120"/>
-              </a:rPr>
-              <a:t>An agent that acts fast</a:t>
-            </a:r>
-            <a:endParaRPr lang="en-US" sz="4200" dirty="0"/>
-          </a:p>
-          <a:p>
-            <a:pPr indent="0" marL="0">
-              <a:lnSpc>
-                <a:spcPts val="5000"/>
-              </a:lnSpc>
-              <a:buNone/>
-            </a:pPr>
-            <a:r>
-              <a:rPr lang="en-US" sz="4200" b="1" dirty="0">
-                <a:solidFill>
-                  <a:srgbClr val="FFFFFF"/>
-                </a:solidFill>
-                <a:latin typeface="Calibri" pitchFamily="34" charset="0"/>
-                <a:ea typeface="Calibri" pitchFamily="34" charset="-122"/>
-                <a:cs typeface="Calibri" pitchFamily="34" charset="-120"/>
-              </a:rPr>
-              <a:t>is easy to build.</a:t>
-            </a:r>
-            <a:endParaRPr lang="en-US" sz="4200" dirty="0"/>
-          </a:p>
-        </p:txBody>
-      </p:sp>
-      <p:sp>
-        <p:nvSpPr>
-          <p:cNvPr id="4" name="Text 2"/>
-          <p:cNvSpPr/>
-          <p:nvPr/>
-        </p:nvSpPr>
-        <p:spPr>
-          <a:xfrm>
-            <a:off x="777240" y="3063240"/>
-            <a:ext cx="8778240" cy="548640"/>
+              <a:buNone/>
+            </a:pPr>
+            <a:r>
+              <a:rPr lang="en-US" sz="5200" b="1" dirty="0">
+                <a:solidFill>
+                  <a:srgbClr val="8AA2DF"/>
+                </a:solidFill>
+                <a:latin typeface="Calibri" pitchFamily="34" charset="0"/>
+                <a:ea typeface="Calibri" pitchFamily="34" charset="-122"/>
+                <a:cs typeface="Calibri" pitchFamily="34" charset="-120"/>
+              </a:rPr>
+              <a:t>380</a:t>
+            </a:r>
+            <a:endParaRPr lang="en-US" sz="5200" dirty="0"/>
+          </a:p>
+        </p:txBody>
+      </p:sp>
+      <p:sp>
+        <p:nvSpPr>
+          <p:cNvPr id="7" name="Text 3"/>
+          <p:cNvSpPr/>
+          <p:nvPr/>
+        </p:nvSpPr>
+        <p:spPr>
+          <a:xfrm>
+            <a:off x="777240" y="5715000"/>
+            <a:ext cx="2880360" cy="566928"/>
           </a:xfrm>
           <a:prstGeom prst="rect">
             <a:avLst/>
@@ -2742,84 +3447,6 @@
               <a:buNone/>
             </a:pPr>
             <a:r>
-              <a:rPr lang="en-US" sz="2100" dirty="0">
-                <a:solidFill>
-                  <a:srgbClr val="C9CFE6"/>
-                </a:solidFill>
-                <a:latin typeface="Calibri" pitchFamily="34" charset="0"/>
-                <a:ea typeface="Calibri" pitchFamily="34" charset="-122"/>
-                <a:cs typeface="Calibri" pitchFamily="34" charset="-120"/>
-              </a:rPr>
-              <a:t>One that stops is the one you would actually let near your company.</a:t>
-            </a:r>
-            <a:endParaRPr lang="en-US" sz="2100" dirty="0"/>
-          </a:p>
-        </p:txBody>
-      </p:sp>
-      <p:sp>
-        <p:nvSpPr>
-          <p:cNvPr id="5" name="Text 3"/>
-          <p:cNvSpPr/>
-          <p:nvPr/>
-        </p:nvSpPr>
-        <p:spPr>
-          <a:xfrm>
-            <a:off x="777240" y="4206240"/>
-            <a:ext cx="2880360" cy="914400"/>
-          </a:xfrm>
-          <a:prstGeom prst="rect">
-            <a:avLst/>
-          </a:prstGeom>
-          <a:noFill/>
-          <a:ln/>
-        </p:spPr>
-        <p:txBody>
-          <a:bodyPr wrap="square" lIns="0" tIns="0" rIns="0" bIns="0" rtlCol="0" anchor="ctr"/>
-          <a:lstStyle/>
-          <a:p>
-            <a:pPr indent="0" marL="0">
-              <a:buNone/>
-            </a:pPr>
-            <a:r>
-              <a:rPr lang="en-US" sz="5200" b="1" dirty="0">
-                <a:solidFill>
-                  <a:srgbClr val="8AA2DF"/>
-                </a:solidFill>
-                <a:latin typeface="Calibri" pitchFamily="34" charset="0"/>
-                <a:ea typeface="Calibri" pitchFamily="34" charset="-122"/>
-                <a:cs typeface="Calibri" pitchFamily="34" charset="-120"/>
-              </a:rPr>
-              <a:t>380</a:t>
-            </a:r>
-            <a:endParaRPr lang="en-US" sz="5200" dirty="0"/>
-          </a:p>
-        </p:txBody>
-      </p:sp>
-      <p:sp>
-        <p:nvSpPr>
-          <p:cNvPr id="6" name="Text 4"/>
-          <p:cNvSpPr/>
-          <p:nvPr/>
-        </p:nvSpPr>
-        <p:spPr>
-          <a:xfrm>
-            <a:off x="777240" y="5074920"/>
-            <a:ext cx="2880360" cy="566928"/>
-          </a:xfrm>
-          <a:prstGeom prst="rect">
-            <a:avLst/>
-          </a:prstGeom>
-          <a:noFill/>
-          <a:ln/>
-        </p:spPr>
-        <p:txBody>
-          <a:bodyPr wrap="square" lIns="0" tIns="0" rIns="0" bIns="0" rtlCol="0" anchor="ctr"/>
-          <a:lstStyle/>
-          <a:p>
-            <a:pPr indent="0" marL="0">
-              <a:buNone/>
-            </a:pPr>
-            <a:r>
               <a:rPr lang="en-US" sz="1050" b="1" spc="100" kern="0" dirty="0">
                 <a:solidFill>
                   <a:srgbClr val="A8AECB"/>
@@ -2836,13 +3463,13 @@
       </p:sp>
       <p:sp>
         <p:nvSpPr>
-          <p:cNvPr id="8" name="Text 5"/>
-          <p:cNvSpPr/>
-          <p:nvPr/>
-        </p:nvSpPr>
-        <p:spPr>
-          <a:xfrm>
-            <a:off x="11155680" y="6172200"/>
+          <p:cNvPr id="9" name="Text 4"/>
+          <p:cNvSpPr/>
+          <p:nvPr/>
+        </p:nvSpPr>
+        <p:spPr>
+          <a:xfrm>
+            <a:off x="11247120" y="6263640"/>
             <a:ext cx="457200" cy="274320"/>
           </a:xfrm>
           <a:prstGeom prst="rect">
@@ -2905,9 +3532,35 @@
           <a:chExt cx="0" cy="0"/>
         </a:xfrm>
       </p:grpSpPr>
-      <p:sp>
-        <p:nvSpPr>
-          <p:cNvPr id="2" name="Text 0"/>
+      <p:pic>
+        <p:nvPicPr>
+          <p:cNvPr id="2" name="Image 0" descr="preencoded.png">    </p:cNvPr>
+          <p:cNvPicPr>
+            <a:picLocks noChangeAspect="1"/>
+          </p:cNvPicPr>
+          <p:nvPr/>
+        </p:nvPicPr>
+        <p:blipFill>
+          <a:blip r:embed="rId1">
+            <a:alphaModFix amt="5000"/>
+          </a:blip>
+          <a:stretch>
+            <a:fillRect/>
+          </a:stretch>
+        </p:blipFill>
+        <p:spPr>
+          <a:xfrm>
+            <a:off x="9966960" y="4297680"/>
+            <a:ext cx="3291840" cy="3291840"/>
+          </a:xfrm>
+          <a:prstGeom prst="rect">
+            <a:avLst/>
+          </a:prstGeom>
+        </p:spPr>
+      </p:pic>
+      <p:sp>
+        <p:nvSpPr>
+          <p:cNvPr id="3" name="Text 0"/>
           <p:cNvSpPr/>
           <p:nvPr/>
         </p:nvSpPr>
@@ -2946,14 +3599,14 @@
       </p:sp>
       <p:sp>
         <p:nvSpPr>
-          <p:cNvPr id="3" name="Text 1"/>
+          <p:cNvPr id="4" name="Text 1"/>
           <p:cNvSpPr/>
           <p:nvPr/>
         </p:nvSpPr>
         <p:spPr>
           <a:xfrm>
             <a:off x="777240" y="1051560"/>
-            <a:ext cx="10607040" cy="1737360"/>
+            <a:ext cx="10424160" cy="1737360"/>
           </a:xfrm>
           <a:prstGeom prst="rect">
             <a:avLst/>
@@ -3006,14 +3659,14 @@
       </p:sp>
       <p:sp>
         <p:nvSpPr>
-          <p:cNvPr id="4" name="Text 2"/>
+          <p:cNvPr id="5" name="Text 2"/>
           <p:cNvSpPr/>
           <p:nvPr/>
         </p:nvSpPr>
         <p:spPr>
           <a:xfrm>
             <a:off x="777240" y="3063240"/>
-            <a:ext cx="8595360" cy="822960"/>
+            <a:ext cx="5852160" cy="822960"/>
           </a:xfrm>
           <a:prstGeom prst="rect">
             <a:avLst/>
@@ -3048,14 +3701,14 @@
       </p:sp>
       <p:sp>
         <p:nvSpPr>
-          <p:cNvPr id="5" name="Text 3"/>
-          <p:cNvSpPr/>
-          <p:nvPr/>
-        </p:nvSpPr>
-        <p:spPr>
-          <a:xfrm>
-            <a:off x="777240" y="4160520"/>
-            <a:ext cx="8595360" cy="822960"/>
+          <p:cNvPr id="6" name="Text 3"/>
+          <p:cNvSpPr/>
+          <p:nvPr/>
+        </p:nvSpPr>
+        <p:spPr>
+          <a:xfrm>
+            <a:off x="777240" y="4434840"/>
+            <a:ext cx="5852160" cy="822960"/>
           </a:xfrm>
           <a:prstGeom prst="rect">
             <a:avLst/>
@@ -3090,13 +3743,278 @@
       </p:sp>
       <p:sp>
         <p:nvSpPr>
-          <p:cNvPr id="7" name="Text 4"/>
-          <p:cNvSpPr/>
-          <p:nvPr/>
-        </p:nvSpPr>
-        <p:spPr>
-          <a:xfrm>
-            <a:off x="11155680" y="6172200"/>
+          <p:cNvPr id="7" name="Shape 4"/>
+          <p:cNvSpPr/>
+          <p:nvPr/>
+        </p:nvSpPr>
+        <p:spPr>
+          <a:xfrm>
+            <a:off x="7315200" y="2331720"/>
+            <a:ext cx="3657600" cy="566928"/>
+          </a:xfrm>
+          <a:prstGeom prst="roundRect">
+            <a:avLst>
+              <a:gd name="adj" fmla="val 12903"/>
+            </a:avLst>
+          </a:prstGeom>
+          <a:solidFill>
+            <a:srgbClr val="F4F5F9"/>
+          </a:solidFill>
+          <a:ln w="12700">
+            <a:solidFill>
+              <a:srgbClr val="E8EBF2"/>
+            </a:solidFill>
+            <a:prstDash val="solid"/>
+          </a:ln>
+        </p:spPr>
+      </p:sp>
+      <p:sp>
+        <p:nvSpPr>
+          <p:cNvPr id="8" name="Shape 5"/>
+          <p:cNvSpPr/>
+          <p:nvPr/>
+        </p:nvSpPr>
+        <p:spPr>
+          <a:xfrm>
+            <a:off x="7461504" y="2459736"/>
+            <a:ext cx="3657600" cy="566928"/>
+          </a:xfrm>
+          <a:prstGeom prst="roundRect">
+            <a:avLst>
+              <a:gd name="adj" fmla="val 12903"/>
+            </a:avLst>
+          </a:prstGeom>
+          <a:solidFill>
+            <a:srgbClr val="F4F5F9"/>
+          </a:solidFill>
+          <a:ln w="12700">
+            <a:solidFill>
+              <a:srgbClr val="E8EBF2"/>
+            </a:solidFill>
+            <a:prstDash val="solid"/>
+          </a:ln>
+        </p:spPr>
+      </p:sp>
+      <p:sp>
+        <p:nvSpPr>
+          <p:cNvPr id="9" name="Shape 6"/>
+          <p:cNvSpPr/>
+          <p:nvPr/>
+        </p:nvSpPr>
+        <p:spPr>
+          <a:xfrm>
+            <a:off x="7607808" y="2587752"/>
+            <a:ext cx="3657600" cy="566928"/>
+          </a:xfrm>
+          <a:prstGeom prst="roundRect">
+            <a:avLst>
+              <a:gd name="adj" fmla="val 12903"/>
+            </a:avLst>
+          </a:prstGeom>
+          <a:solidFill>
+            <a:srgbClr val="F4F5F9"/>
+          </a:solidFill>
+          <a:ln w="12700">
+            <a:solidFill>
+              <a:srgbClr val="E8EBF2"/>
+            </a:solidFill>
+            <a:prstDash val="solid"/>
+          </a:ln>
+        </p:spPr>
+      </p:sp>
+      <p:sp>
+        <p:nvSpPr>
+          <p:cNvPr id="10" name="Shape 7"/>
+          <p:cNvSpPr/>
+          <p:nvPr/>
+        </p:nvSpPr>
+        <p:spPr>
+          <a:xfrm>
+            <a:off x="7754112" y="2715768"/>
+            <a:ext cx="3657600" cy="566928"/>
+          </a:xfrm>
+          <a:prstGeom prst="roundRect">
+            <a:avLst>
+              <a:gd name="adj" fmla="val 12903"/>
+            </a:avLst>
+          </a:prstGeom>
+          <a:solidFill>
+            <a:srgbClr val="F4F5F9"/>
+          </a:solidFill>
+          <a:ln w="12700">
+            <a:solidFill>
+              <a:srgbClr val="E8EBF2"/>
+            </a:solidFill>
+            <a:prstDash val="solid"/>
+          </a:ln>
+        </p:spPr>
+      </p:sp>
+      <p:sp>
+        <p:nvSpPr>
+          <p:cNvPr id="11" name="Shape 8"/>
+          <p:cNvSpPr/>
+          <p:nvPr/>
+        </p:nvSpPr>
+        <p:spPr>
+          <a:xfrm>
+            <a:off x="7900416" y="2843784"/>
+            <a:ext cx="3657600" cy="566928"/>
+          </a:xfrm>
+          <a:prstGeom prst="roundRect">
+            <a:avLst>
+              <a:gd name="adj" fmla="val 12903"/>
+            </a:avLst>
+          </a:prstGeom>
+          <a:solidFill>
+            <a:srgbClr val="F4F5F9"/>
+          </a:solidFill>
+          <a:ln w="12700">
+            <a:solidFill>
+              <a:srgbClr val="E8EBF2"/>
+            </a:solidFill>
+            <a:prstDash val="solid"/>
+          </a:ln>
+        </p:spPr>
+      </p:sp>
+      <p:sp>
+        <p:nvSpPr>
+          <p:cNvPr id="12" name="Text 9"/>
+          <p:cNvSpPr/>
+          <p:nvPr/>
+        </p:nvSpPr>
+        <p:spPr>
+          <a:xfrm>
+            <a:off x="8138160" y="2862072"/>
+            <a:ext cx="2743200" cy="457200"/>
+          </a:xfrm>
+          <a:prstGeom prst="rect">
+            <a:avLst/>
+          </a:prstGeom>
+          <a:noFill/>
+          <a:ln/>
+        </p:spPr>
+        <p:txBody>
+          <a:bodyPr wrap="square" lIns="0" tIns="0" rIns="0" bIns="0" rtlCol="0" anchor="ctr"/>
+          <a:lstStyle/>
+          <a:p>
+            <a:pPr indent="0" marL="0">
+              <a:buNone/>
+            </a:pPr>
+            <a:r>
+              <a:rPr lang="en-US" sz="1700" b="1" dirty="0">
+                <a:solidFill>
+                  <a:srgbClr val="6B7391"/>
+                </a:solidFill>
+                <a:latin typeface="Calibri" pitchFamily="34" charset="0"/>
+                <a:ea typeface="Calibri" pitchFamily="34" charset="-122"/>
+                <a:cs typeface="Calibri" pitchFamily="34" charset="-120"/>
+              </a:rPr>
+              <a:t>44 tickets</a:t>
+            </a:r>
+            <a:endParaRPr lang="en-US" sz="1700" dirty="0"/>
+          </a:p>
+        </p:txBody>
+      </p:sp>
+      <p:sp>
+        <p:nvSpPr>
+          <p:cNvPr id="13" name="Shape 10"/>
+          <p:cNvSpPr/>
+          <p:nvPr/>
+        </p:nvSpPr>
+        <p:spPr>
+          <a:xfrm>
+            <a:off x="9235440" y="3767328"/>
+            <a:ext cx="329184" cy="566928"/>
+          </a:xfrm>
+          <a:prstGeom prst="downArrow">
+            <a:avLst/>
+          </a:prstGeom>
+          <a:solidFill>
+            <a:srgbClr val="8AA2DF"/>
+          </a:solidFill>
+          <a:ln w="12700">
+            <a:solidFill>
+              <a:srgbClr val="8AA2DF"/>
+            </a:solidFill>
+            <a:prstDash val="solid"/>
+          </a:ln>
+        </p:spPr>
+      </p:sp>
+      <p:sp>
+        <p:nvSpPr>
+          <p:cNvPr id="14" name="Shape 11"/>
+          <p:cNvSpPr/>
+          <p:nvPr/>
+        </p:nvSpPr>
+        <p:spPr>
+          <a:xfrm>
+            <a:off x="7315200" y="4572000"/>
+            <a:ext cx="3657600" cy="786384"/>
+          </a:xfrm>
+          <a:prstGeom prst="roundRect">
+            <a:avLst>
+              <a:gd name="adj" fmla="val 11628"/>
+            </a:avLst>
+          </a:prstGeom>
+          <a:solidFill>
+            <a:srgbClr val="141A42"/>
+          </a:solidFill>
+          <a:ln w="12700">
+            <a:solidFill>
+              <a:srgbClr val="141A42"/>
+            </a:solidFill>
+            <a:prstDash val="solid"/>
+          </a:ln>
+        </p:spPr>
+      </p:sp>
+      <p:sp>
+        <p:nvSpPr>
+          <p:cNvPr id="15" name="Text 12"/>
+          <p:cNvSpPr/>
+          <p:nvPr/>
+        </p:nvSpPr>
+        <p:spPr>
+          <a:xfrm>
+            <a:off x="7315200" y="4572000"/>
+            <a:ext cx="3657600" cy="786384"/>
+          </a:xfrm>
+          <a:prstGeom prst="rect">
+            <a:avLst/>
+          </a:prstGeom>
+          <a:noFill/>
+          <a:ln/>
+        </p:spPr>
+        <p:txBody>
+          <a:bodyPr wrap="square" lIns="0" tIns="0" rIns="0" bIns="0" rtlCol="0" anchor="ctr"/>
+          <a:lstStyle/>
+          <a:p>
+            <a:pPr algn="ctr" indent="0" marL="0">
+              <a:buNone/>
+            </a:pPr>
+            <a:r>
+              <a:rPr lang="en-US" sz="1800" b="1" dirty="0">
+                <a:solidFill>
+                  <a:srgbClr val="FFFFFF"/>
+                </a:solidFill>
+                <a:latin typeface="Calibri" pitchFamily="34" charset="0"/>
+                <a:ea typeface="Calibri" pitchFamily="34" charset="-122"/>
+                <a:cs typeface="Calibri" pitchFamily="34" charset="-120"/>
+              </a:rPr>
+              <a:t>1 root cause</a:t>
+            </a:r>
+            <a:endParaRPr lang="en-US" sz="1800" dirty="0"/>
+          </a:p>
+        </p:txBody>
+      </p:sp>
+      <p:sp>
+        <p:nvSpPr>
+          <p:cNvPr id="17" name="Text 13"/>
+          <p:cNvSpPr/>
+          <p:nvPr/>
+        </p:nvSpPr>
+        <p:spPr>
+          <a:xfrm>
+            <a:off x="11247120" y="6263640"/>
             <a:ext cx="457200" cy="274320"/>
           </a:xfrm>
           <a:prstGeom prst="rect">
@@ -3159,9 +4077,35 @@
           <a:chExt cx="0" cy="0"/>
         </a:xfrm>
       </p:grpSpPr>
-      <p:sp>
-        <p:nvSpPr>
-          <p:cNvPr id="2" name="Text 0"/>
+      <p:pic>
+        <p:nvPicPr>
+          <p:cNvPr id="2" name="Image 0" descr="preencoded.png">    </p:cNvPr>
+          <p:cNvPicPr>
+            <a:picLocks noChangeAspect="1"/>
+          </p:cNvPicPr>
+          <p:nvPr/>
+        </p:nvPicPr>
+        <p:blipFill>
+          <a:blip r:embed="rId1">
+            <a:alphaModFix amt="8000"/>
+          </a:blip>
+          <a:stretch>
+            <a:fillRect/>
+          </a:stretch>
+        </p:blipFill>
+        <p:spPr>
+          <a:xfrm>
+            <a:off x="9966960" y="4297680"/>
+            <a:ext cx="3291840" cy="3291840"/>
+          </a:xfrm>
+          <a:prstGeom prst="rect">
+            <a:avLst/>
+          </a:prstGeom>
+        </p:spPr>
+      </p:pic>
+      <p:sp>
+        <p:nvSpPr>
+          <p:cNvPr id="3" name="Text 0"/>
           <p:cNvSpPr/>
           <p:nvPr/>
         </p:nvSpPr>
@@ -3200,14 +4144,14 @@
       </p:sp>
       <p:sp>
         <p:nvSpPr>
-          <p:cNvPr id="3" name="Text 1"/>
+          <p:cNvPr id="4" name="Text 1"/>
           <p:cNvSpPr/>
           <p:nvPr/>
         </p:nvSpPr>
         <p:spPr>
           <a:xfrm>
             <a:off x="777240" y="1051560"/>
-            <a:ext cx="10607040" cy="822960"/>
+            <a:ext cx="10424160" cy="822960"/>
           </a:xfrm>
           <a:prstGeom prst="rect">
             <a:avLst/>
@@ -3239,14 +4183,14 @@
       </p:sp>
       <p:sp>
         <p:nvSpPr>
-          <p:cNvPr id="4" name="Shape 2"/>
+          <p:cNvPr id="5" name="Shape 2"/>
           <p:cNvSpPr/>
           <p:nvPr/>
         </p:nvSpPr>
         <p:spPr>
           <a:xfrm>
             <a:off x="777240" y="2286000"/>
-            <a:ext cx="3319272" cy="2286000"/>
+            <a:ext cx="3200400" cy="2286000"/>
           </a:xfrm>
           <a:prstGeom prst="roundRect">
             <a:avLst>
@@ -3266,7 +4210,7 @@
       </p:sp>
       <p:sp>
         <p:nvSpPr>
-          <p:cNvPr id="5" name="Shape 3"/>
+          <p:cNvPr id="6" name="Shape 3"/>
           <p:cNvSpPr/>
           <p:nvPr/>
         </p:nvSpPr>
@@ -3291,7 +4235,7 @@
       </p:sp>
       <p:sp>
         <p:nvSpPr>
-          <p:cNvPr id="6" name="Text 4"/>
+          <p:cNvPr id="7" name="Text 4"/>
           <p:cNvSpPr/>
           <p:nvPr/>
         </p:nvSpPr>
@@ -3330,14 +4274,14 @@
       </p:sp>
       <p:sp>
         <p:nvSpPr>
-          <p:cNvPr id="7" name="Text 5"/>
+          <p:cNvPr id="8" name="Text 5"/>
           <p:cNvSpPr/>
           <p:nvPr/>
         </p:nvSpPr>
         <p:spPr>
           <a:xfrm>
             <a:off x="1069848" y="3200400"/>
-            <a:ext cx="2734056" cy="566928"/>
+            <a:ext cx="2615184" cy="566928"/>
           </a:xfrm>
           <a:prstGeom prst="rect">
             <a:avLst/>
@@ -3386,14 +4330,14 @@
       </p:sp>
       <p:sp>
         <p:nvSpPr>
-          <p:cNvPr id="8" name="Text 6"/>
+          <p:cNvPr id="9" name="Text 6"/>
           <p:cNvSpPr/>
           <p:nvPr/>
         </p:nvSpPr>
         <p:spPr>
           <a:xfrm>
             <a:off x="1069848" y="3767328"/>
-            <a:ext cx="2734056" cy="658368"/>
+            <a:ext cx="2615184" cy="658368"/>
           </a:xfrm>
           <a:prstGeom prst="rect">
             <a:avLst/>
@@ -3428,14 +4372,14 @@
       </p:sp>
       <p:sp>
         <p:nvSpPr>
-          <p:cNvPr id="9" name="Shape 7"/>
-          <p:cNvSpPr/>
-          <p:nvPr/>
-        </p:nvSpPr>
-        <p:spPr>
-          <a:xfrm>
-            <a:off x="4416552" y="2286000"/>
-            <a:ext cx="3319272" cy="2286000"/>
+          <p:cNvPr id="10" name="Shape 7"/>
+          <p:cNvSpPr/>
+          <p:nvPr/>
+        </p:nvSpPr>
+        <p:spPr>
+          <a:xfrm>
+            <a:off x="4297680" y="2286000"/>
+            <a:ext cx="3200400" cy="2286000"/>
           </a:xfrm>
           <a:prstGeom prst="roundRect">
             <a:avLst>
@@ -3455,13 +4399,13 @@
       </p:sp>
       <p:sp>
         <p:nvSpPr>
-          <p:cNvPr id="10" name="Shape 8"/>
-          <p:cNvSpPr/>
-          <p:nvPr/>
-        </p:nvSpPr>
-        <p:spPr>
-          <a:xfrm>
-            <a:off x="4709160" y="2560320"/>
+          <p:cNvPr id="11" name="Shape 8"/>
+          <p:cNvSpPr/>
+          <p:nvPr/>
+        </p:nvSpPr>
+        <p:spPr>
+          <a:xfrm>
+            <a:off x="4590288" y="2560320"/>
             <a:ext cx="475488" cy="475488"/>
           </a:xfrm>
           <a:prstGeom prst="ellipse">
@@ -3480,13 +4424,13 @@
       </p:sp>
       <p:sp>
         <p:nvSpPr>
-          <p:cNvPr id="11" name="Text 9"/>
-          <p:cNvSpPr/>
-          <p:nvPr/>
-        </p:nvSpPr>
-        <p:spPr>
-          <a:xfrm>
-            <a:off x="4709160" y="2560320"/>
+          <p:cNvPr id="12" name="Text 9"/>
+          <p:cNvSpPr/>
+          <p:nvPr/>
+        </p:nvSpPr>
+        <p:spPr>
+          <a:xfrm>
+            <a:off x="4590288" y="2560320"/>
             <a:ext cx="475488" cy="475488"/>
           </a:xfrm>
           <a:prstGeom prst="rect">
@@ -3519,14 +4463,14 @@
       </p:sp>
       <p:sp>
         <p:nvSpPr>
-          <p:cNvPr id="12" name="Text 10"/>
-          <p:cNvSpPr/>
-          <p:nvPr/>
-        </p:nvSpPr>
-        <p:spPr>
-          <a:xfrm>
-            <a:off x="4709160" y="3200400"/>
-            <a:ext cx="2734056" cy="566928"/>
+          <p:cNvPr id="13" name="Text 10"/>
+          <p:cNvSpPr/>
+          <p:nvPr/>
+        </p:nvSpPr>
+        <p:spPr>
+          <a:xfrm>
+            <a:off x="4590288" y="3200400"/>
+            <a:ext cx="2615184" cy="566928"/>
           </a:xfrm>
           <a:prstGeom prst="rect">
             <a:avLst/>
@@ -3575,14 +4519,14 @@
       </p:sp>
       <p:sp>
         <p:nvSpPr>
-          <p:cNvPr id="13" name="Text 11"/>
-          <p:cNvSpPr/>
-          <p:nvPr/>
-        </p:nvSpPr>
-        <p:spPr>
-          <a:xfrm>
-            <a:off x="4709160" y="3767328"/>
-            <a:ext cx="2734056" cy="658368"/>
+          <p:cNvPr id="14" name="Text 11"/>
+          <p:cNvSpPr/>
+          <p:nvPr/>
+        </p:nvSpPr>
+        <p:spPr>
+          <a:xfrm>
+            <a:off x="4590288" y="3767328"/>
+            <a:ext cx="2615184" cy="658368"/>
           </a:xfrm>
           <a:prstGeom prst="rect">
             <a:avLst/>
@@ -3617,14 +4561,14 @@
       </p:sp>
       <p:sp>
         <p:nvSpPr>
-          <p:cNvPr id="14" name="Shape 12"/>
-          <p:cNvSpPr/>
-          <p:nvPr/>
-        </p:nvSpPr>
-        <p:spPr>
-          <a:xfrm>
-            <a:off x="8055864" y="2286000"/>
-            <a:ext cx="3319272" cy="2286000"/>
+          <p:cNvPr id="15" name="Shape 12"/>
+          <p:cNvSpPr/>
+          <p:nvPr/>
+        </p:nvSpPr>
+        <p:spPr>
+          <a:xfrm>
+            <a:off x="7818120" y="2286000"/>
+            <a:ext cx="3200400" cy="2286000"/>
           </a:xfrm>
           <a:prstGeom prst="roundRect">
             <a:avLst>
@@ -3644,13 +4588,13 @@
       </p:sp>
       <p:sp>
         <p:nvSpPr>
-          <p:cNvPr id="15" name="Shape 13"/>
-          <p:cNvSpPr/>
-          <p:nvPr/>
-        </p:nvSpPr>
-        <p:spPr>
-          <a:xfrm>
-            <a:off x="8348472" y="2560320"/>
+          <p:cNvPr id="16" name="Shape 13"/>
+          <p:cNvSpPr/>
+          <p:nvPr/>
+        </p:nvSpPr>
+        <p:spPr>
+          <a:xfrm>
+            <a:off x="8110728" y="2560320"/>
             <a:ext cx="475488" cy="475488"/>
           </a:xfrm>
           <a:prstGeom prst="ellipse">
@@ -3669,13 +4613,13 @@
       </p:sp>
       <p:sp>
         <p:nvSpPr>
-          <p:cNvPr id="16" name="Text 14"/>
-          <p:cNvSpPr/>
-          <p:nvPr/>
-        </p:nvSpPr>
-        <p:spPr>
-          <a:xfrm>
-            <a:off x="8348472" y="2560320"/>
+          <p:cNvPr id="17" name="Text 14"/>
+          <p:cNvSpPr/>
+          <p:nvPr/>
+        </p:nvSpPr>
+        <p:spPr>
+          <a:xfrm>
+            <a:off x="8110728" y="2560320"/>
             <a:ext cx="475488" cy="475488"/>
           </a:xfrm>
           <a:prstGeom prst="rect">
@@ -3708,14 +4652,14 @@
       </p:sp>
       <p:sp>
         <p:nvSpPr>
-          <p:cNvPr id="17" name="Text 15"/>
-          <p:cNvSpPr/>
-          <p:nvPr/>
-        </p:nvSpPr>
-        <p:spPr>
-          <a:xfrm>
-            <a:off x="8348472" y="3200400"/>
-            <a:ext cx="2734056" cy="566928"/>
+          <p:cNvPr id="18" name="Text 15"/>
+          <p:cNvSpPr/>
+          <p:nvPr/>
+        </p:nvSpPr>
+        <p:spPr>
+          <a:xfrm>
+            <a:off x="8110728" y="3200400"/>
+            <a:ext cx="2615184" cy="566928"/>
           </a:xfrm>
           <a:prstGeom prst="rect">
             <a:avLst/>
@@ -3764,14 +4708,14 @@
       </p:sp>
       <p:sp>
         <p:nvSpPr>
-          <p:cNvPr id="18" name="Text 16"/>
-          <p:cNvSpPr/>
-          <p:nvPr/>
-        </p:nvSpPr>
-        <p:spPr>
-          <a:xfrm>
-            <a:off x="8348472" y="3767328"/>
-            <a:ext cx="2734056" cy="658368"/>
+          <p:cNvPr id="19" name="Text 16"/>
+          <p:cNvSpPr/>
+          <p:nvPr/>
+        </p:nvSpPr>
+        <p:spPr>
+          <a:xfrm>
+            <a:off x="8110728" y="3767328"/>
+            <a:ext cx="2615184" cy="658368"/>
           </a:xfrm>
           <a:prstGeom prst="rect">
             <a:avLst/>
@@ -3812,7 +4756,46 @@
         </p:nvSpPr>
         <p:spPr>
           <a:xfrm>
-            <a:off x="11155680" y="6172200"/>
+            <a:off x="777240" y="5029200"/>
+            <a:ext cx="10058400" cy="457200"/>
+          </a:xfrm>
+          <a:prstGeom prst="rect">
+            <a:avLst/>
+          </a:prstGeom>
+          <a:noFill/>
+          <a:ln/>
+        </p:spPr>
+        <p:txBody>
+          <a:bodyPr wrap="square" lIns="0" tIns="0" rIns="0" bIns="0" rtlCol="0" anchor="ctr"/>
+          <a:lstStyle/>
+          <a:p>
+            <a:pPr indent="0" marL="0">
+              <a:buNone/>
+            </a:pPr>
+            <a:r>
+              <a:rPr lang="en-US" sz="1600" dirty="0">
+                <a:solidFill>
+                  <a:srgbClr val="A8AECB"/>
+                </a:solidFill>
+                <a:latin typeface="Calibri" pitchFamily="34" charset="0"/>
+                <a:ea typeface="Calibri" pitchFamily="34" charset="-122"/>
+                <a:cs typeface="Calibri" pitchFamily="34" charset="-120"/>
+              </a:rPr>
+              <a:t>All three are the same instinct: knowing where its own judgement runs out.</a:t>
+            </a:r>
+            <a:endParaRPr lang="en-US" sz="1600" dirty="0"/>
+          </a:p>
+        </p:txBody>
+      </p:sp>
+      <p:sp>
+        <p:nvSpPr>
+          <p:cNvPr id="22" name="Text 18"/>
+          <p:cNvSpPr/>
+          <p:nvPr/>
+        </p:nvSpPr>
+        <p:spPr>
+          <a:xfrm>
+            <a:off x="11247120" y="6263640"/>
             <a:ext cx="457200" cy="274320"/>
           </a:xfrm>
           <a:prstGeom prst="rect">
@@ -3875,9 +4858,35 @@
           <a:chExt cx="0" cy="0"/>
         </a:xfrm>
       </p:grpSpPr>
-      <p:sp>
-        <p:nvSpPr>
-          <p:cNvPr id="2" name="Text 0"/>
+      <p:pic>
+        <p:nvPicPr>
+          <p:cNvPr id="2" name="Image 0" descr="preencoded.png">    </p:cNvPr>
+          <p:cNvPicPr>
+            <a:picLocks noChangeAspect="1"/>
+          </p:cNvPicPr>
+          <p:nvPr/>
+        </p:nvPicPr>
+        <p:blipFill>
+          <a:blip r:embed="rId1">
+            <a:alphaModFix amt="5000"/>
+          </a:blip>
+          <a:stretch>
+            <a:fillRect/>
+          </a:stretch>
+        </p:blipFill>
+        <p:spPr>
+          <a:xfrm>
+            <a:off x="9966960" y="4297680"/>
+            <a:ext cx="3291840" cy="3291840"/>
+          </a:xfrm>
+          <a:prstGeom prst="rect">
+            <a:avLst/>
+          </a:prstGeom>
+        </p:spPr>
+      </p:pic>
+      <p:sp>
+        <p:nvSpPr>
+          <p:cNvPr id="3" name="Text 0"/>
           <p:cNvSpPr/>
           <p:nvPr/>
         </p:nvSpPr>
@@ -3916,14 +4925,14 @@
       </p:sp>
       <p:sp>
         <p:nvSpPr>
-          <p:cNvPr id="3" name="Text 1"/>
+          <p:cNvPr id="4" name="Text 1"/>
           <p:cNvSpPr/>
           <p:nvPr/>
         </p:nvSpPr>
         <p:spPr>
           <a:xfrm>
             <a:off x="777240" y="1051560"/>
-            <a:ext cx="10607040" cy="1737360"/>
+            <a:ext cx="10424160" cy="1737360"/>
           </a:xfrm>
           <a:prstGeom prst="rect">
             <a:avLst/>
@@ -3976,14 +4985,14 @@
       </p:sp>
       <p:sp>
         <p:nvSpPr>
-          <p:cNvPr id="4" name="Text 2"/>
-          <p:cNvSpPr/>
-          <p:nvPr/>
-        </p:nvSpPr>
-        <p:spPr>
-          <a:xfrm>
-            <a:off x="777240" y="3017520"/>
-            <a:ext cx="9509760" cy="822960"/>
+          <p:cNvPr id="5" name="Text 2"/>
+          <p:cNvSpPr/>
+          <p:nvPr/>
+        </p:nvSpPr>
+        <p:spPr>
+          <a:xfrm>
+            <a:off x="777240" y="2971800"/>
+            <a:ext cx="9326880" cy="731520"/>
           </a:xfrm>
           <a:prstGeom prst="rect">
             <a:avLst/>
@@ -4018,14 +5027,14 @@
       </p:sp>
       <p:sp>
         <p:nvSpPr>
-          <p:cNvPr id="5" name="Shape 3"/>
-          <p:cNvSpPr/>
-          <p:nvPr/>
-        </p:nvSpPr>
-        <p:spPr>
-          <a:xfrm>
-            <a:off x="777240" y="3977640"/>
-            <a:ext cx="9509760" cy="1417320"/>
+          <p:cNvPr id="6" name="Shape 3"/>
+          <p:cNvSpPr/>
+          <p:nvPr/>
+        </p:nvSpPr>
+        <p:spPr>
+          <a:xfrm>
+            <a:off x="777240" y="3840480"/>
+            <a:ext cx="9326880" cy="1417320"/>
           </a:xfrm>
           <a:prstGeom prst="roundRect">
             <a:avLst>
@@ -4045,14 +5054,53 @@
       </p:sp>
       <p:sp>
         <p:nvSpPr>
-          <p:cNvPr id="6" name="Text 4"/>
-          <p:cNvSpPr/>
-          <p:nvPr/>
-        </p:nvSpPr>
-        <p:spPr>
-          <a:xfrm>
-            <a:off x="1143000" y="4178808"/>
-            <a:ext cx="8778240" cy="731520"/>
+          <p:cNvPr id="7" name="Text 4"/>
+          <p:cNvSpPr/>
+          <p:nvPr/>
+        </p:nvSpPr>
+        <p:spPr>
+          <a:xfrm>
+            <a:off x="941832" y="3858768"/>
+            <a:ext cx="548640" cy="640080"/>
+          </a:xfrm>
+          <a:prstGeom prst="rect">
+            <a:avLst/>
+          </a:prstGeom>
+          <a:noFill/>
+          <a:ln/>
+        </p:spPr>
+        <p:txBody>
+          <a:bodyPr wrap="square" lIns="0" tIns="0" rIns="0" bIns="0" rtlCol="0" anchor="ctr"/>
+          <a:lstStyle/>
+          <a:p>
+            <a:pPr indent="0" marL="0">
+              <a:buNone/>
+            </a:pPr>
+            <a:r>
+              <a:rPr lang="en-US" sz="4400" b="1" dirty="0">
+                <a:solidFill>
+                  <a:srgbClr val="8AA2DF"/>
+                </a:solidFill>
+                <a:latin typeface="Cambria" pitchFamily="34" charset="0"/>
+                <a:ea typeface="Cambria" pitchFamily="34" charset="-122"/>
+                <a:cs typeface="Cambria" pitchFamily="34" charset="-120"/>
+              </a:rPr>
+              <a:t>“</a:t>
+            </a:r>
+            <a:endParaRPr lang="en-US" sz="4400" dirty="0"/>
+          </a:p>
+        </p:txBody>
+      </p:sp>
+      <p:sp>
+        <p:nvSpPr>
+          <p:cNvPr id="8" name="Text 5"/>
+          <p:cNvSpPr/>
+          <p:nvPr/>
+        </p:nvSpPr>
+        <p:spPr>
+          <a:xfrm>
+            <a:off x="1435608" y="4059936"/>
+            <a:ext cx="8412480" cy="713232"/>
           </a:xfrm>
           <a:prstGeom prst="rect">
             <a:avLst/>
@@ -4079,7 +5127,7 @@
                 <a:ea typeface="Calibri" pitchFamily="34" charset="-122"/>
                 <a:cs typeface="Calibri" pitchFamily="34" charset="-120"/>
               </a:rPr>
-              <a:t>"Implement a Self-Service Password Reset portal integrated with MFA, so users verify their own identity and reset credentials without help desk intervention."</a:t>
+              <a:t>Implement a Self-Service Password Reset portal integrated with MFA, so users verify their own identity and reset credentials without help desk intervention.</a:t>
             </a:r>
             <a:endParaRPr lang="en-US" sz="1500" dirty="0"/>
           </a:p>
@@ -4087,14 +5135,14 @@
       </p:sp>
       <p:sp>
         <p:nvSpPr>
-          <p:cNvPr id="7" name="Text 5"/>
-          <p:cNvSpPr/>
-          <p:nvPr/>
-        </p:nvSpPr>
-        <p:spPr>
-          <a:xfrm>
-            <a:off x="1143000" y="4946904"/>
-            <a:ext cx="8778240" cy="274320"/>
+          <p:cNvPr id="9" name="Text 6"/>
+          <p:cNvSpPr/>
+          <p:nvPr/>
+        </p:nvSpPr>
+        <p:spPr>
+          <a:xfrm>
+            <a:off x="1435608" y="4809744"/>
+            <a:ext cx="8412480" cy="274320"/>
           </a:xfrm>
           <a:prstGeom prst="rect">
             <a:avLst/>
@@ -4126,14 +5174,14 @@
       </p:sp>
       <p:sp>
         <p:nvSpPr>
-          <p:cNvPr id="8" name="Text 6"/>
-          <p:cNvSpPr/>
-          <p:nvPr/>
-        </p:nvSpPr>
-        <p:spPr>
-          <a:xfrm>
-            <a:off x="777240" y="5623560"/>
-            <a:ext cx="9509760" cy="457200"/>
+          <p:cNvPr id="10" name="Text 7"/>
+          <p:cNvSpPr/>
+          <p:nvPr/>
+        </p:nvSpPr>
+        <p:spPr>
+          <a:xfrm>
+            <a:off x="777240" y="5532120"/>
+            <a:ext cx="9326880" cy="457200"/>
           </a:xfrm>
           <a:prstGeom prst="rect">
             <a:avLst/>
@@ -4157,7 +5205,7 @@
                 <a:ea typeface="Calibri" pitchFamily="34" charset="-122"/>
                 <a:cs typeface="Calibri" pitchFamily="34" charset="-120"/>
               </a:rPr>
-              <a:t>Those 37 tickets stop arriving. </a:t>
+              <a:t>Those 37 tickets stop arriving.  </a:t>
             </a:r>
             <a:pPr indent="0" marL="0">
               <a:buNone/>
@@ -4179,13 +5227,13 @@
       </p:sp>
       <p:sp>
         <p:nvSpPr>
-          <p:cNvPr id="10" name="Text 7"/>
-          <p:cNvSpPr/>
-          <p:nvPr/>
-        </p:nvSpPr>
-        <p:spPr>
-          <a:xfrm>
-            <a:off x="11155680" y="6172200"/>
+          <p:cNvPr id="12" name="Text 8"/>
+          <p:cNvSpPr/>
+          <p:nvPr/>
+        </p:nvSpPr>
+        <p:spPr>
+          <a:xfrm>
+            <a:off x="11247120" y="6263640"/>
             <a:ext cx="457200" cy="274320"/>
           </a:xfrm>
           <a:prstGeom prst="rect">
@@ -4248,9 +5296,35 @@
           <a:chExt cx="0" cy="0"/>
         </a:xfrm>
       </p:grpSpPr>
-      <p:sp>
-        <p:nvSpPr>
-          <p:cNvPr id="2" name="Text 0"/>
+      <p:pic>
+        <p:nvPicPr>
+          <p:cNvPr id="2" name="Image 0" descr="preencoded.png">    </p:cNvPr>
+          <p:cNvPicPr>
+            <a:picLocks noChangeAspect="1"/>
+          </p:cNvPicPr>
+          <p:nvPr/>
+        </p:nvPicPr>
+        <p:blipFill>
+          <a:blip r:embed="rId1">
+            <a:alphaModFix amt="5000"/>
+          </a:blip>
+          <a:stretch>
+            <a:fillRect/>
+          </a:stretch>
+        </p:blipFill>
+        <p:spPr>
+          <a:xfrm>
+            <a:off x="9966960" y="4297680"/>
+            <a:ext cx="3291840" cy="3291840"/>
+          </a:xfrm>
+          <a:prstGeom prst="rect">
+            <a:avLst/>
+          </a:prstGeom>
+        </p:spPr>
+      </p:pic>
+      <p:sp>
+        <p:nvSpPr>
+          <p:cNvPr id="3" name="Text 0"/>
           <p:cNvSpPr/>
           <p:nvPr/>
         </p:nvSpPr>
@@ -4289,14 +5363,14 @@
       </p:sp>
       <p:sp>
         <p:nvSpPr>
-          <p:cNvPr id="3" name="Text 1"/>
+          <p:cNvPr id="4" name="Text 1"/>
           <p:cNvSpPr/>
           <p:nvPr/>
         </p:nvSpPr>
         <p:spPr>
           <a:xfrm>
             <a:off x="777240" y="1051560"/>
-            <a:ext cx="10607040" cy="1737360"/>
+            <a:ext cx="10424160" cy="1737360"/>
           </a:xfrm>
           <a:prstGeom prst="rect">
             <a:avLst/>
@@ -4351,248 +5425,14 @@
       </p:sp>
       <p:sp>
         <p:nvSpPr>
-          <p:cNvPr id="4" name="Text 2"/>
-          <p:cNvSpPr/>
-          <p:nvPr/>
-        </p:nvSpPr>
-        <p:spPr>
-          <a:xfrm>
-            <a:off x="777240" y="3200400"/>
-            <a:ext cx="2880360" cy="914400"/>
-          </a:xfrm>
-          <a:prstGeom prst="rect">
-            <a:avLst/>
-          </a:prstGeom>
-          <a:noFill/>
-          <a:ln/>
-        </p:spPr>
-        <p:txBody>
-          <a:bodyPr wrap="square" lIns="0" tIns="0" rIns="0" bIns="0" rtlCol="0" anchor="ctr"/>
-          <a:lstStyle/>
-          <a:p>
-            <a:pPr indent="0" marL="0">
-              <a:buNone/>
-            </a:pPr>
-            <a:r>
-              <a:rPr lang="en-US" sz="5200" b="1" dirty="0">
-                <a:solidFill>
-                  <a:srgbClr val="141A42"/>
-                </a:solidFill>
-                <a:latin typeface="Calibri" pitchFamily="34" charset="0"/>
-                <a:ea typeface="Calibri" pitchFamily="34" charset="-122"/>
-                <a:cs typeface="Calibri" pitchFamily="34" charset="-120"/>
-              </a:rPr>
-              <a:t>15</a:t>
-            </a:r>
-            <a:endParaRPr lang="en-US" sz="5200" dirty="0"/>
-          </a:p>
-        </p:txBody>
-      </p:sp>
-      <p:sp>
-        <p:nvSpPr>
-          <p:cNvPr id="5" name="Text 3"/>
-          <p:cNvSpPr/>
-          <p:nvPr/>
-        </p:nvSpPr>
-        <p:spPr>
-          <a:xfrm>
-            <a:off x="777240" y="4069080"/>
-            <a:ext cx="2880360" cy="566928"/>
-          </a:xfrm>
-          <a:prstGeom prst="rect">
-            <a:avLst/>
-          </a:prstGeom>
-          <a:noFill/>
-          <a:ln/>
-        </p:spPr>
-        <p:txBody>
-          <a:bodyPr wrap="square" lIns="0" tIns="0" rIns="0" bIns="0" rtlCol="0" anchor="ctr"/>
-          <a:lstStyle/>
-          <a:p>
-            <a:pPr indent="0" marL="0">
-              <a:buNone/>
-            </a:pPr>
-            <a:r>
-              <a:rPr lang="en-US" sz="1050" b="1" spc="100" kern="0" dirty="0">
-                <a:solidFill>
-                  <a:srgbClr val="6B7391"/>
-                </a:solidFill>
-                <a:latin typeface="Calibri" pitchFamily="34" charset="0"/>
-                <a:ea typeface="Calibri" pitchFamily="34" charset="-122"/>
-                <a:cs typeface="Calibri" pitchFamily="34" charset="-120"/>
-              </a:rPr>
-              <a:t>ROOT CAUSES FOUND</a:t>
-            </a:r>
-            <a:endParaRPr lang="en-US" sz="1050" dirty="0"/>
-          </a:p>
-        </p:txBody>
-      </p:sp>
-      <p:sp>
-        <p:nvSpPr>
-          <p:cNvPr id="6" name="Text 4"/>
-          <p:cNvSpPr/>
-          <p:nvPr/>
-        </p:nvSpPr>
-        <p:spPr>
-          <a:xfrm>
-            <a:off x="3931920" y="3200400"/>
-            <a:ext cx="2880360" cy="914400"/>
-          </a:xfrm>
-          <a:prstGeom prst="rect">
-            <a:avLst/>
-          </a:prstGeom>
-          <a:noFill/>
-          <a:ln/>
-        </p:spPr>
-        <p:txBody>
-          <a:bodyPr wrap="square" lIns="0" tIns="0" rIns="0" bIns="0" rtlCol="0" anchor="ctr"/>
-          <a:lstStyle/>
-          <a:p>
-            <a:pPr indent="0" marL="0">
-              <a:buNone/>
-            </a:pPr>
-            <a:r>
-              <a:rPr lang="en-US" sz="5200" b="1" dirty="0">
-                <a:solidFill>
-                  <a:srgbClr val="141A42"/>
-                </a:solidFill>
-                <a:latin typeface="Calibri" pitchFamily="34" charset="0"/>
-                <a:ea typeface="Calibri" pitchFamily="34" charset="-122"/>
-                <a:cs typeface="Calibri" pitchFamily="34" charset="-120"/>
-              </a:rPr>
-              <a:t>75</a:t>
-            </a:r>
-            <a:endParaRPr lang="en-US" sz="5200" dirty="0"/>
-          </a:p>
-        </p:txBody>
-      </p:sp>
-      <p:sp>
-        <p:nvSpPr>
-          <p:cNvPr id="7" name="Text 5"/>
-          <p:cNvSpPr/>
-          <p:nvPr/>
-        </p:nvSpPr>
-        <p:spPr>
-          <a:xfrm>
-            <a:off x="3931920" y="4069080"/>
-            <a:ext cx="2880360" cy="566928"/>
-          </a:xfrm>
-          <a:prstGeom prst="rect">
-            <a:avLst/>
-          </a:prstGeom>
-          <a:noFill/>
-          <a:ln/>
-        </p:spPr>
-        <p:txBody>
-          <a:bodyPr wrap="square" lIns="0" tIns="0" rIns="0" bIns="0" rtlCol="0" anchor="ctr"/>
-          <a:lstStyle/>
-          <a:p>
-            <a:pPr indent="0" marL="0">
-              <a:buNone/>
-            </a:pPr>
-            <a:r>
-              <a:rPr lang="en-US" sz="1050" b="1" spc="100" kern="0" dirty="0">
-                <a:solidFill>
-                  <a:srgbClr val="6B7391"/>
-                </a:solidFill>
-                <a:latin typeface="Calibri" pitchFamily="34" charset="0"/>
-                <a:ea typeface="Calibri" pitchFamily="34" charset="-122"/>
-                <a:cs typeface="Calibri" pitchFamily="34" charset="-120"/>
-              </a:rPr>
-              <a:t>COLLAPSED TODAY · WORK AVOIDED</a:t>
-            </a:r>
-            <a:endParaRPr lang="en-US" sz="1050" dirty="0"/>
-          </a:p>
-        </p:txBody>
-      </p:sp>
-      <p:sp>
-        <p:nvSpPr>
-          <p:cNvPr id="8" name="Text 6"/>
-          <p:cNvSpPr/>
-          <p:nvPr/>
-        </p:nvSpPr>
-        <p:spPr>
-          <a:xfrm>
-            <a:off x="7086600" y="3200400"/>
-            <a:ext cx="2880360" cy="914400"/>
-          </a:xfrm>
-          <a:prstGeom prst="rect">
-            <a:avLst/>
-          </a:prstGeom>
-          <a:noFill/>
-          <a:ln/>
-        </p:spPr>
-        <p:txBody>
-          <a:bodyPr wrap="square" lIns="0" tIns="0" rIns="0" bIns="0" rtlCol="0" anchor="ctr"/>
-          <a:lstStyle/>
-          <a:p>
-            <a:pPr indent="0" marL="0">
-              <a:buNone/>
-            </a:pPr>
-            <a:r>
-              <a:rPr lang="en-US" sz="5200" b="1" dirty="0">
-                <a:solidFill>
-                  <a:srgbClr val="8AA2DF"/>
-                </a:solidFill>
-                <a:latin typeface="Calibri" pitchFamily="34" charset="0"/>
-                <a:ea typeface="Calibri" pitchFamily="34" charset="-122"/>
-                <a:cs typeface="Calibri" pitchFamily="34" charset="-120"/>
-              </a:rPr>
-              <a:t>380</a:t>
-            </a:r>
-            <a:endParaRPr lang="en-US" sz="5200" dirty="0"/>
-          </a:p>
-        </p:txBody>
-      </p:sp>
-      <p:sp>
-        <p:nvSpPr>
-          <p:cNvPr id="9" name="Text 7"/>
-          <p:cNvSpPr/>
-          <p:nvPr/>
-        </p:nvSpPr>
-        <p:spPr>
-          <a:xfrm>
-            <a:off x="7086600" y="4069080"/>
-            <a:ext cx="2880360" cy="566928"/>
-          </a:xfrm>
-          <a:prstGeom prst="rect">
-            <a:avLst/>
-          </a:prstGeom>
-          <a:noFill/>
-          <a:ln/>
-        </p:spPr>
-        <p:txBody>
-          <a:bodyPr wrap="square" lIns="0" tIns="0" rIns="0" bIns="0" rtlCol="0" anchor="ctr"/>
-          <a:lstStyle/>
-          <a:p>
-            <a:pPr indent="0" marL="0">
-              <a:buNone/>
-            </a:pPr>
-            <a:r>
-              <a:rPr lang="en-US" sz="1050" b="1" spc="100" kern="0" dirty="0">
-                <a:solidFill>
-                  <a:srgbClr val="6B7391"/>
-                </a:solidFill>
-                <a:latin typeface="Calibri" pitchFamily="34" charset="0"/>
-                <a:ea typeface="Calibri" pitchFamily="34" charset="-122"/>
-                <a:cs typeface="Calibri" pitchFamily="34" charset="-120"/>
-              </a:rPr>
-              <a:t>PREVENTABLE · A FORECAST</a:t>
-            </a:r>
-            <a:endParaRPr lang="en-US" sz="1050" dirty="0"/>
-          </a:p>
-        </p:txBody>
-      </p:sp>
-      <p:sp>
-        <p:nvSpPr>
-          <p:cNvPr id="10" name="Text 8"/>
-          <p:cNvSpPr/>
-          <p:nvPr/>
-        </p:nvSpPr>
-        <p:spPr>
-          <a:xfrm>
-            <a:off x="777240" y="4892040"/>
-            <a:ext cx="9692640" cy="822960"/>
+          <p:cNvPr id="5" name="Text 2"/>
+          <p:cNvSpPr/>
+          <p:nvPr/>
+        </p:nvSpPr>
+        <p:spPr>
+          <a:xfrm>
+            <a:off x="777240" y="3017520"/>
+            <a:ext cx="5212080" cy="1097280"/>
           </a:xfrm>
           <a:prstGeom prst="rect">
             <a:avLst/>
@@ -4619,7 +5459,7 @@
                 <a:ea typeface="Calibri" pitchFamily="34" charset="-122"/>
                 <a:cs typeface="Calibri" pitchFamily="34" charset="-120"/>
               </a:rPr>
-              <a:t>Two numbers, never blended. One is work already avoided. The other is conditional on a human approving each fix. Adding them together would make a better headline and a worse answer.</a:t>
+              <a:t>Two numbers, never blended. One is work already avoided. The other is conditional on a human approving each fix.</a:t>
             </a:r>
             <a:endParaRPr lang="en-US" sz="1700" dirty="0"/>
           </a:p>
@@ -4627,13 +5467,231 @@
       </p:sp>
       <p:sp>
         <p:nvSpPr>
-          <p:cNvPr id="12" name="Text 9"/>
-          <p:cNvSpPr/>
-          <p:nvPr/>
-        </p:nvSpPr>
-        <p:spPr>
-          <a:xfrm>
-            <a:off x="11155680" y="6172200"/>
+          <p:cNvPr id="6" name="Text 3"/>
+          <p:cNvSpPr/>
+          <p:nvPr/>
+        </p:nvSpPr>
+        <p:spPr>
+          <a:xfrm>
+            <a:off x="777240" y="4297680"/>
+            <a:ext cx="2331720" cy="914400"/>
+          </a:xfrm>
+          <a:prstGeom prst="rect">
+            <a:avLst/>
+          </a:prstGeom>
+          <a:noFill/>
+          <a:ln/>
+        </p:spPr>
+        <p:txBody>
+          <a:bodyPr wrap="square" lIns="0" tIns="0" rIns="0" bIns="0" rtlCol="0" anchor="ctr"/>
+          <a:lstStyle/>
+          <a:p>
+            <a:pPr indent="0" marL="0">
+              <a:buNone/>
+            </a:pPr>
+            <a:r>
+              <a:rPr lang="en-US" sz="5000" b="1" dirty="0">
+                <a:solidFill>
+                  <a:srgbClr val="141A42"/>
+                </a:solidFill>
+                <a:latin typeface="Calibri" pitchFamily="34" charset="0"/>
+                <a:ea typeface="Calibri" pitchFamily="34" charset="-122"/>
+                <a:cs typeface="Calibri" pitchFamily="34" charset="-120"/>
+              </a:rPr>
+              <a:t>75</a:t>
+            </a:r>
+            <a:endParaRPr lang="en-US" sz="5000" dirty="0"/>
+          </a:p>
+        </p:txBody>
+      </p:sp>
+      <p:sp>
+        <p:nvSpPr>
+          <p:cNvPr id="7" name="Text 4"/>
+          <p:cNvSpPr/>
+          <p:nvPr/>
+        </p:nvSpPr>
+        <p:spPr>
+          <a:xfrm>
+            <a:off x="777240" y="5193792"/>
+            <a:ext cx="2331720" cy="603504"/>
+          </a:xfrm>
+          <a:prstGeom prst="rect">
+            <a:avLst/>
+          </a:prstGeom>
+          <a:noFill/>
+          <a:ln/>
+        </p:spPr>
+        <p:txBody>
+          <a:bodyPr wrap="square" lIns="0" tIns="0" rIns="0" bIns="0" rtlCol="0" anchor="ctr"/>
+          <a:lstStyle/>
+          <a:p>
+            <a:pPr indent="0" marL="0">
+              <a:lnSpc>
+                <a:spcPts val="1300"/>
+              </a:lnSpc>
+              <a:buNone/>
+            </a:pPr>
+            <a:r>
+              <a:rPr lang="en-US" sz="1050" b="1" spc="100" kern="0" dirty="0">
+                <a:solidFill>
+                  <a:srgbClr val="6B7391"/>
+                </a:solidFill>
+                <a:latin typeface="Calibri" pitchFamily="34" charset="0"/>
+                <a:ea typeface="Calibri" pitchFamily="34" charset="-122"/>
+                <a:cs typeface="Calibri" pitchFamily="34" charset="-120"/>
+              </a:rPr>
+              <a:t>COLLAPSED TODAY</a:t>
+            </a:r>
+            <a:endParaRPr lang="en-US" sz="1050" dirty="0"/>
+          </a:p>
+          <a:p>
+            <a:pPr indent="0" marL="0">
+              <a:lnSpc>
+                <a:spcPts val="1300"/>
+              </a:lnSpc>
+              <a:buNone/>
+            </a:pPr>
+            <a:r>
+              <a:rPr lang="en-US" sz="1050" b="1" spc="100" kern="0" dirty="0">
+                <a:solidFill>
+                  <a:srgbClr val="6B7391"/>
+                </a:solidFill>
+                <a:latin typeface="Calibri" pitchFamily="34" charset="0"/>
+                <a:ea typeface="Calibri" pitchFamily="34" charset="-122"/>
+                <a:cs typeface="Calibri" pitchFamily="34" charset="-120"/>
+              </a:rPr>
+              <a:t>WORK AVOIDED</a:t>
+            </a:r>
+            <a:endParaRPr lang="en-US" sz="1050" dirty="0"/>
+          </a:p>
+        </p:txBody>
+      </p:sp>
+      <p:sp>
+        <p:nvSpPr>
+          <p:cNvPr id="8" name="Text 5"/>
+          <p:cNvSpPr/>
+          <p:nvPr/>
+        </p:nvSpPr>
+        <p:spPr>
+          <a:xfrm>
+            <a:off x="3291840" y="4297680"/>
+            <a:ext cx="2331720" cy="914400"/>
+          </a:xfrm>
+          <a:prstGeom prst="rect">
+            <a:avLst/>
+          </a:prstGeom>
+          <a:noFill/>
+          <a:ln/>
+        </p:spPr>
+        <p:txBody>
+          <a:bodyPr wrap="square" lIns="0" tIns="0" rIns="0" bIns="0" rtlCol="0" anchor="ctr"/>
+          <a:lstStyle/>
+          <a:p>
+            <a:pPr indent="0" marL="0">
+              <a:buNone/>
+            </a:pPr>
+            <a:r>
+              <a:rPr lang="en-US" sz="5000" b="1" dirty="0">
+                <a:solidFill>
+                  <a:srgbClr val="8AA2DF"/>
+                </a:solidFill>
+                <a:latin typeface="Calibri" pitchFamily="34" charset="0"/>
+                <a:ea typeface="Calibri" pitchFamily="34" charset="-122"/>
+                <a:cs typeface="Calibri" pitchFamily="34" charset="-120"/>
+              </a:rPr>
+              <a:t>380</a:t>
+            </a:r>
+            <a:endParaRPr lang="en-US" sz="5000" dirty="0"/>
+          </a:p>
+        </p:txBody>
+      </p:sp>
+      <p:sp>
+        <p:nvSpPr>
+          <p:cNvPr id="9" name="Text 6"/>
+          <p:cNvSpPr/>
+          <p:nvPr/>
+        </p:nvSpPr>
+        <p:spPr>
+          <a:xfrm>
+            <a:off x="3291840" y="5193792"/>
+            <a:ext cx="2331720" cy="603504"/>
+          </a:xfrm>
+          <a:prstGeom prst="rect">
+            <a:avLst/>
+          </a:prstGeom>
+          <a:noFill/>
+          <a:ln/>
+        </p:spPr>
+        <p:txBody>
+          <a:bodyPr wrap="square" lIns="0" tIns="0" rIns="0" bIns="0" rtlCol="0" anchor="ctr"/>
+          <a:lstStyle/>
+          <a:p>
+            <a:pPr indent="0" marL="0">
+              <a:lnSpc>
+                <a:spcPts val="1300"/>
+              </a:lnSpc>
+              <a:buNone/>
+            </a:pPr>
+            <a:r>
+              <a:rPr lang="en-US" sz="1050" b="1" spc="100" kern="0" dirty="0">
+                <a:solidFill>
+                  <a:srgbClr val="6B7391"/>
+                </a:solidFill>
+                <a:latin typeface="Calibri" pitchFamily="34" charset="0"/>
+                <a:ea typeface="Calibri" pitchFamily="34" charset="-122"/>
+                <a:cs typeface="Calibri" pitchFamily="34" charset="-120"/>
+              </a:rPr>
+              <a:t>PREVENTABLE</a:t>
+            </a:r>
+            <a:endParaRPr lang="en-US" sz="1050" dirty="0"/>
+          </a:p>
+          <a:p>
+            <a:pPr indent="0" marL="0">
+              <a:lnSpc>
+                <a:spcPts val="1300"/>
+              </a:lnSpc>
+              <a:buNone/>
+            </a:pPr>
+            <a:r>
+              <a:rPr lang="en-US" sz="1050" b="1" spc="100" kern="0" dirty="0">
+                <a:solidFill>
+                  <a:srgbClr val="6B7391"/>
+                </a:solidFill>
+                <a:latin typeface="Calibri" pitchFamily="34" charset="0"/>
+                <a:ea typeface="Calibri" pitchFamily="34" charset="-122"/>
+                <a:cs typeface="Calibri" pitchFamily="34" charset="-120"/>
+              </a:rPr>
+              <a:t>A FORECAST</a:t>
+            </a:r>
+            <a:endParaRPr lang="en-US" sz="1050" dirty="0"/>
+          </a:p>
+        </p:txBody>
+      </p:sp>
+      <p:graphicFrame>
+        <p:nvGraphicFramePr>
+          <p:cNvPr id="10" name="Chart 0" descr=""/>
+          <p:cNvGraphicFramePr/>
+          <p:nvPr/>
+        </p:nvGraphicFramePr>
+        <p:xfrm>
+          <a:off x="6400800" y="1371600"/>
+          <a:ext cx="5120640" cy="4206240"/>
+        </p:xfrm>
+        <a:graphic xmlns:a="http://schemas.openxmlformats.org/drawingml/2006/main">
+          <a:graphicData uri="http://schemas.openxmlformats.org/drawingml/2006/chart">
+            <c:chart xmlns:c="http://schemas.openxmlformats.org/drawingml/2006/chart" r:id="rId2"/>
+          </a:graphicData>
+        </a:graphic>
+      </p:graphicFrame>
+      <p:sp>
+        <p:nvSpPr>
+          <p:cNvPr id="12" name="Text 7"/>
+          <p:cNvSpPr/>
+          <p:nvPr/>
+        </p:nvSpPr>
+        <p:spPr>
+          <a:xfrm>
+            <a:off x="11247120" y="6263640"/>
             <a:ext cx="457200" cy="274320"/>
           </a:xfrm>
           <a:prstGeom prst="rect">
@@ -4696,9 +5754,35 @@
           <a:chExt cx="0" cy="0"/>
         </a:xfrm>
       </p:grpSpPr>
-      <p:sp>
-        <p:nvSpPr>
-          <p:cNvPr id="2" name="Text 0"/>
+      <p:pic>
+        <p:nvPicPr>
+          <p:cNvPr id="2" name="Image 0" descr="preencoded.png">    </p:cNvPr>
+          <p:cNvPicPr>
+            <a:picLocks noChangeAspect="1"/>
+          </p:cNvPicPr>
+          <p:nvPr/>
+        </p:nvPicPr>
+        <p:blipFill>
+          <a:blip r:embed="rId1">
+            <a:alphaModFix amt="5000"/>
+          </a:blip>
+          <a:stretch>
+            <a:fillRect/>
+          </a:stretch>
+        </p:blipFill>
+        <p:spPr>
+          <a:xfrm>
+            <a:off x="9966960" y="4297680"/>
+            <a:ext cx="3291840" cy="3291840"/>
+          </a:xfrm>
+          <a:prstGeom prst="rect">
+            <a:avLst/>
+          </a:prstGeom>
+        </p:spPr>
+      </p:pic>
+      <p:sp>
+        <p:nvSpPr>
+          <p:cNvPr id="3" name="Text 0"/>
           <p:cNvSpPr/>
           <p:nvPr/>
         </p:nvSpPr>
@@ -4737,14 +5821,14 @@
       </p:sp>
       <p:sp>
         <p:nvSpPr>
-          <p:cNvPr id="3" name="Text 1"/>
+          <p:cNvPr id="4" name="Text 1"/>
           <p:cNvSpPr/>
           <p:nvPr/>
         </p:nvSpPr>
         <p:spPr>
           <a:xfrm>
             <a:off x="777240" y="1051560"/>
-            <a:ext cx="10607040" cy="1737360"/>
+            <a:ext cx="6126480" cy="1737360"/>
           </a:xfrm>
           <a:prstGeom prst="rect">
             <a:avLst/>
@@ -4799,14 +5883,14 @@
       </p:sp>
       <p:sp>
         <p:nvSpPr>
-          <p:cNvPr id="4" name="Text 2"/>
-          <p:cNvSpPr/>
-          <p:nvPr/>
-        </p:nvSpPr>
-        <p:spPr>
-          <a:xfrm>
-            <a:off x="777240" y="3063240"/>
-            <a:ext cx="9509760" cy="457200"/>
+          <p:cNvPr id="5" name="Text 2"/>
+          <p:cNvSpPr/>
+          <p:nvPr/>
+        </p:nvSpPr>
+        <p:spPr>
+          <a:xfrm>
+            <a:off x="777240" y="3017520"/>
+            <a:ext cx="6035040" cy="548640"/>
           </a:xfrm>
           <a:prstGeom prst="rect">
             <a:avLst/>
@@ -4841,14 +5925,14 @@
       </p:sp>
       <p:sp>
         <p:nvSpPr>
-          <p:cNvPr id="5" name="Text 3"/>
-          <p:cNvSpPr/>
-          <p:nvPr/>
-        </p:nvSpPr>
-        <p:spPr>
-          <a:xfrm>
-            <a:off x="777240" y="3703320"/>
-            <a:ext cx="9509760" cy="914400"/>
+          <p:cNvPr id="6" name="Text 3"/>
+          <p:cNvSpPr/>
+          <p:nvPr/>
+        </p:nvSpPr>
+        <p:spPr>
+          <a:xfrm>
+            <a:off x="777240" y="3657600"/>
+            <a:ext cx="6035040" cy="1188720"/>
           </a:xfrm>
           <a:prstGeom prst="rect">
             <a:avLst/>
@@ -4883,13 +5967,13 @@
       </p:sp>
       <p:sp>
         <p:nvSpPr>
-          <p:cNvPr id="6" name="Text 4"/>
-          <p:cNvSpPr/>
-          <p:nvPr/>
-        </p:nvSpPr>
-        <p:spPr>
-          <a:xfrm>
-            <a:off x="777240" y="4892040"/>
+          <p:cNvPr id="7" name="Text 4"/>
+          <p:cNvSpPr/>
+          <p:nvPr/>
+        </p:nvSpPr>
+        <p:spPr>
+          <a:xfrm>
+            <a:off x="777240" y="4983480"/>
             <a:ext cx="2880360" cy="914400"/>
           </a:xfrm>
           <a:prstGeom prst="rect">
@@ -4922,13 +6006,13 @@
       </p:sp>
       <p:sp>
         <p:nvSpPr>
-          <p:cNvPr id="7" name="Text 5"/>
-          <p:cNvSpPr/>
-          <p:nvPr/>
-        </p:nvSpPr>
-        <p:spPr>
-          <a:xfrm>
-            <a:off x="777240" y="5760720"/>
+          <p:cNvPr id="8" name="Text 5"/>
+          <p:cNvSpPr/>
+          <p:nvPr/>
+        </p:nvSpPr>
+        <p:spPr>
+          <a:xfrm>
+            <a:off x="777240" y="5852160"/>
             <a:ext cx="2880360" cy="566928"/>
           </a:xfrm>
           <a:prstGeom prst="rect">
@@ -4961,14 +6045,14 @@
       </p:sp>
       <p:sp>
         <p:nvSpPr>
-          <p:cNvPr id="8" name="Text 6"/>
-          <p:cNvSpPr/>
-          <p:nvPr/>
-        </p:nvSpPr>
-        <p:spPr>
-          <a:xfrm>
-            <a:off x="3931920" y="4892040"/>
-            <a:ext cx="2880360" cy="914400"/>
+          <p:cNvPr id="9" name="Text 6"/>
+          <p:cNvSpPr/>
+          <p:nvPr/>
+        </p:nvSpPr>
+        <p:spPr>
+          <a:xfrm>
+            <a:off x="7223760" y="1371600"/>
+            <a:ext cx="4206240" cy="274320"/>
           </a:xfrm>
           <a:prstGeom prst="rect">
             <a:avLst/>
@@ -4984,7 +6068,203 @@
               <a:buNone/>
             </a:pPr>
             <a:r>
-              <a:rPr lang="en-US" sz="5200" b="1" dirty="0">
+              <a:rPr lang="en-US" sz="1000" b="1" spc="150" kern="0" dirty="0">
+                <a:solidFill>
+                  <a:srgbClr val="6B7391"/>
+                </a:solidFill>
+                <a:latin typeface="Calibri" pitchFamily="34" charset="0"/>
+                <a:ea typeface="Calibri" pitchFamily="34" charset="-122"/>
+                <a:cs typeface="Calibri" pitchFamily="34" charset="-120"/>
+              </a:rPr>
+              <a:t>PRECEDENCE, TOP DOWN</a:t>
+            </a:r>
+            <a:endParaRPr lang="en-US" sz="1000" dirty="0"/>
+          </a:p>
+        </p:txBody>
+      </p:sp>
+      <p:sp>
+        <p:nvSpPr>
+          <p:cNvPr id="10" name="Shape 7"/>
+          <p:cNvSpPr/>
+          <p:nvPr/>
+        </p:nvSpPr>
+        <p:spPr>
+          <a:xfrm>
+            <a:off x="7223760" y="1783080"/>
+            <a:ext cx="4206240" cy="841248"/>
+          </a:xfrm>
+          <a:prstGeom prst="roundRect">
+            <a:avLst>
+              <a:gd name="adj" fmla="val 10870"/>
+            </a:avLst>
+          </a:prstGeom>
+          <a:solidFill>
+            <a:srgbClr val="141A42"/>
+          </a:solidFill>
+          <a:ln w="12700">
+            <a:solidFill>
+              <a:srgbClr val="141A42"/>
+            </a:solidFill>
+            <a:prstDash val="solid"/>
+          </a:ln>
+        </p:spPr>
+      </p:sp>
+      <p:sp>
+        <p:nvSpPr>
+          <p:cNvPr id="11" name="Text 8"/>
+          <p:cNvSpPr/>
+          <p:nvPr/>
+        </p:nvSpPr>
+        <p:spPr>
+          <a:xfrm>
+            <a:off x="7452360" y="1911096"/>
+            <a:ext cx="3749040" cy="310896"/>
+          </a:xfrm>
+          <a:prstGeom prst="rect">
+            <a:avLst/>
+          </a:prstGeom>
+          <a:noFill/>
+          <a:ln/>
+        </p:spPr>
+        <p:txBody>
+          <a:bodyPr wrap="square" lIns="0" tIns="0" rIns="0" bIns="0" rtlCol="0" anchor="ctr"/>
+          <a:lstStyle/>
+          <a:p>
+            <a:pPr indent="0" marL="0">
+              <a:buNone/>
+            </a:pPr>
+            <a:r>
+              <a:rPr lang="en-US" sz="1400" b="1" dirty="0">
+                <a:solidFill>
+                  <a:srgbClr val="FFFFFF"/>
+                </a:solidFill>
+                <a:latin typeface="Calibri" pitchFamily="34" charset="0"/>
+                <a:ea typeface="Calibri" pitchFamily="34" charset="-122"/>
+                <a:cs typeface="Calibri" pitchFamily="34" charset="-120"/>
+              </a:rPr>
+              <a:t>Change control</a:t>
+            </a:r>
+            <a:endParaRPr lang="en-US" sz="1400" dirty="0"/>
+          </a:p>
+        </p:txBody>
+      </p:sp>
+      <p:sp>
+        <p:nvSpPr>
+          <p:cNvPr id="12" name="Text 9"/>
+          <p:cNvSpPr/>
+          <p:nvPr/>
+        </p:nvSpPr>
+        <p:spPr>
+          <a:xfrm>
+            <a:off x="7452360" y="2221992"/>
+            <a:ext cx="3749040" cy="310896"/>
+          </a:xfrm>
+          <a:prstGeom prst="rect">
+            <a:avLst/>
+          </a:prstGeom>
+          <a:noFill/>
+          <a:ln/>
+        </p:spPr>
+        <p:txBody>
+          <a:bodyPr wrap="square" lIns="0" tIns="0" rIns="0" bIns="0" rtlCol="0" anchor="ctr"/>
+          <a:lstStyle/>
+          <a:p>
+            <a:pPr indent="0" marL="0">
+              <a:buNone/>
+            </a:pPr>
+            <a:r>
+              <a:rPr lang="en-US" sz="1050" dirty="0">
+                <a:solidFill>
+                  <a:srgbClr val="A8AECB"/>
+                </a:solidFill>
+                <a:latin typeface="Calibri" pitchFamily="34" charset="0"/>
+                <a:ea typeface="Calibri" pitchFamily="34" charset="-122"/>
+                <a:cs typeface="Calibri" pitchFamily="34" charset="-120"/>
+              </a:rPr>
+              <a:t>an open approval outranks everything</a:t>
+            </a:r>
+            <a:endParaRPr lang="en-US" sz="1050" dirty="0"/>
+          </a:p>
+        </p:txBody>
+      </p:sp>
+      <p:sp>
+        <p:nvSpPr>
+          <p:cNvPr id="13" name="Shape 10"/>
+          <p:cNvSpPr/>
+          <p:nvPr/>
+        </p:nvSpPr>
+        <p:spPr>
+          <a:xfrm>
+            <a:off x="9162288" y="2642616"/>
+            <a:ext cx="146304" cy="146304"/>
+          </a:xfrm>
+          <a:prstGeom prst="downArrow">
+            <a:avLst/>
+          </a:prstGeom>
+          <a:solidFill>
+            <a:srgbClr val="8AA2DF"/>
+          </a:solidFill>
+          <a:ln w="12700">
+            <a:solidFill>
+              <a:srgbClr val="8AA2DF"/>
+            </a:solidFill>
+            <a:prstDash val="solid"/>
+          </a:ln>
+        </p:spPr>
+      </p:sp>
+      <p:sp>
+        <p:nvSpPr>
+          <p:cNvPr id="14" name="Shape 11"/>
+          <p:cNvSpPr/>
+          <p:nvPr/>
+        </p:nvSpPr>
+        <p:spPr>
+          <a:xfrm>
+            <a:off x="7223760" y="2807208"/>
+            <a:ext cx="4206240" cy="841248"/>
+          </a:xfrm>
+          <a:prstGeom prst="roundRect">
+            <a:avLst>
+              <a:gd name="adj" fmla="val 10870"/>
+            </a:avLst>
+          </a:prstGeom>
+          <a:solidFill>
+            <a:srgbClr val="F4F5F9"/>
+          </a:solidFill>
+          <a:ln w="12700">
+            <a:solidFill>
+              <a:srgbClr val="E8EBF2"/>
+            </a:solidFill>
+            <a:prstDash val="solid"/>
+          </a:ln>
+        </p:spPr>
+      </p:sp>
+      <p:sp>
+        <p:nvSpPr>
+          <p:cNvPr id="15" name="Text 12"/>
+          <p:cNvSpPr/>
+          <p:nvPr/>
+        </p:nvSpPr>
+        <p:spPr>
+          <a:xfrm>
+            <a:off x="7452360" y="2935224"/>
+            <a:ext cx="3749040" cy="310896"/>
+          </a:xfrm>
+          <a:prstGeom prst="rect">
+            <a:avLst/>
+          </a:prstGeom>
+          <a:noFill/>
+          <a:ln/>
+        </p:spPr>
+        <p:txBody>
+          <a:bodyPr wrap="square" lIns="0" tIns="0" rIns="0" bIns="0" rtlCol="0" anchor="ctr"/>
+          <a:lstStyle/>
+          <a:p>
+            <a:pPr indent="0" marL="0">
+              <a:buNone/>
+            </a:pPr>
+            <a:r>
+              <a:rPr lang="en-US" sz="1400" b="1" dirty="0">
                 <a:solidFill>
                   <a:srgbClr val="141A42"/>
                 </a:solidFill>
@@ -4992,22 +6272,22 @@
                 <a:ea typeface="Calibri" pitchFamily="34" charset="-122"/>
                 <a:cs typeface="Calibri" pitchFamily="34" charset="-120"/>
               </a:rPr>
-              <a:t>4</a:t>
-            </a:r>
-            <a:endParaRPr lang="en-US" sz="5200" dirty="0"/>
-          </a:p>
-        </p:txBody>
-      </p:sp>
-      <p:sp>
-        <p:nvSpPr>
-          <p:cNvPr id="9" name="Text 7"/>
-          <p:cNvSpPr/>
-          <p:nvPr/>
-        </p:nvSpPr>
-        <p:spPr>
-          <a:xfrm>
-            <a:off x="3931920" y="5760720"/>
-            <a:ext cx="2880360" cy="566928"/>
+              <a:t>Access change</a:t>
+            </a:r>
+            <a:endParaRPr lang="en-US" sz="1400" dirty="0"/>
+          </a:p>
+        </p:txBody>
+      </p:sp>
+      <p:sp>
+        <p:nvSpPr>
+          <p:cNvPr id="16" name="Text 13"/>
+          <p:cNvSpPr/>
+          <p:nvPr/>
+        </p:nvSpPr>
+        <p:spPr>
+          <a:xfrm>
+            <a:off x="7452360" y="3246120"/>
+            <a:ext cx="3749040" cy="310896"/>
           </a:xfrm>
           <a:prstGeom prst="rect">
             <a:avLst/>
@@ -5023,7 +6303,7 @@
               <a:buNone/>
             </a:pPr>
             <a:r>
-              <a:rPr lang="en-US" sz="1050" b="1" spc="100" kern="0" dirty="0">
+              <a:rPr lang="en-US" sz="1050" dirty="0">
                 <a:solidFill>
                   <a:srgbClr val="6B7391"/>
                 </a:solidFill>
@@ -5031,7 +6311,7 @@
                 <a:ea typeface="Calibri" pitchFamily="34" charset="-122"/>
                 <a:cs typeface="Calibri" pitchFamily="34" charset="-120"/>
               </a:rPr>
-              <a:t>REFUSAL REASONS, NONE OVERRIDABLE</a:t>
+              <a:t>never automated, whatever the confidence</a:t>
             </a:r>
             <a:endParaRPr lang="en-US" sz="1050" dirty="0"/>
           </a:p>
@@ -5039,13 +6319,273 @@
       </p:sp>
       <p:sp>
         <p:nvSpPr>
-          <p:cNvPr id="11" name="Text 8"/>
-          <p:cNvSpPr/>
-          <p:nvPr/>
-        </p:nvSpPr>
-        <p:spPr>
-          <a:xfrm>
-            <a:off x="11155680" y="6172200"/>
+          <p:cNvPr id="17" name="Shape 14"/>
+          <p:cNvSpPr/>
+          <p:nvPr/>
+        </p:nvSpPr>
+        <p:spPr>
+          <a:xfrm>
+            <a:off x="9162288" y="3666744"/>
+            <a:ext cx="146304" cy="146304"/>
+          </a:xfrm>
+          <a:prstGeom prst="downArrow">
+            <a:avLst/>
+          </a:prstGeom>
+          <a:solidFill>
+            <a:srgbClr val="8AA2DF"/>
+          </a:solidFill>
+          <a:ln w="12700">
+            <a:solidFill>
+              <a:srgbClr val="8AA2DF"/>
+            </a:solidFill>
+            <a:prstDash val="solid"/>
+          </a:ln>
+        </p:spPr>
+      </p:sp>
+      <p:sp>
+        <p:nvSpPr>
+          <p:cNvPr id="18" name="Shape 15"/>
+          <p:cNvSpPr/>
+          <p:nvPr/>
+        </p:nvSpPr>
+        <p:spPr>
+          <a:xfrm>
+            <a:off x="7223760" y="3831336"/>
+            <a:ext cx="4206240" cy="841248"/>
+          </a:xfrm>
+          <a:prstGeom prst="roundRect">
+            <a:avLst>
+              <a:gd name="adj" fmla="val 10870"/>
+            </a:avLst>
+          </a:prstGeom>
+          <a:solidFill>
+            <a:srgbClr val="F4F5F9"/>
+          </a:solidFill>
+          <a:ln w="12700">
+            <a:solidFill>
+              <a:srgbClr val="E8EBF2"/>
+            </a:solidFill>
+            <a:prstDash val="solid"/>
+          </a:ln>
+        </p:spPr>
+      </p:sp>
+      <p:sp>
+        <p:nvSpPr>
+          <p:cNvPr id="19" name="Text 16"/>
+          <p:cNvSpPr/>
+          <p:nvPr/>
+        </p:nvSpPr>
+        <p:spPr>
+          <a:xfrm>
+            <a:off x="7452360" y="3959352"/>
+            <a:ext cx="3749040" cy="310896"/>
+          </a:xfrm>
+          <a:prstGeom prst="rect">
+            <a:avLst/>
+          </a:prstGeom>
+          <a:noFill/>
+          <a:ln/>
+        </p:spPr>
+        <p:txBody>
+          <a:bodyPr wrap="square" lIns="0" tIns="0" rIns="0" bIns="0" rtlCol="0" anchor="ctr"/>
+          <a:lstStyle/>
+          <a:p>
+            <a:pPr indent="0" marL="0">
+              <a:buNone/>
+            </a:pPr>
+            <a:r>
+              <a:rPr lang="en-US" sz="1400" b="1" dirty="0">
+                <a:solidFill>
+                  <a:srgbClr val="141A42"/>
+                </a:solidFill>
+                <a:latin typeface="Calibri" pitchFamily="34" charset="0"/>
+                <a:ea typeface="Calibri" pitchFamily="34" charset="-122"/>
+                <a:cs typeface="Calibri" pitchFamily="34" charset="-120"/>
+              </a:rPr>
+              <a:t>Identity</a:t>
+            </a:r>
+            <a:endParaRPr lang="en-US" sz="1400" dirty="0"/>
+          </a:p>
+        </p:txBody>
+      </p:sp>
+      <p:sp>
+        <p:nvSpPr>
+          <p:cNvPr id="20" name="Text 17"/>
+          <p:cNvSpPr/>
+          <p:nvPr/>
+        </p:nvSpPr>
+        <p:spPr>
+          <a:xfrm>
+            <a:off x="7452360" y="4270248"/>
+            <a:ext cx="3749040" cy="310896"/>
+          </a:xfrm>
+          <a:prstGeom prst="rect">
+            <a:avLst/>
+          </a:prstGeom>
+          <a:noFill/>
+          <a:ln/>
+        </p:spPr>
+        <p:txBody>
+          <a:bodyPr wrap="square" lIns="0" tIns="0" rIns="0" bIns="0" rtlCol="0" anchor="ctr"/>
+          <a:lstStyle/>
+          <a:p>
+            <a:pPr indent="0" marL="0">
+              <a:buNone/>
+            </a:pPr>
+            <a:r>
+              <a:rPr lang="en-US" sz="1050" dirty="0">
+                <a:solidFill>
+                  <a:srgbClr val="6B7391"/>
+                </a:solidFill>
+                <a:latin typeface="Calibri" pitchFamily="34" charset="0"/>
+                <a:ea typeface="Calibri" pitchFamily="34" charset="-122"/>
+                <a:cs typeface="Calibri" pitchFamily="34" charset="-120"/>
+              </a:rPr>
+              <a:t>exactly one match, or stop</a:t>
+            </a:r>
+            <a:endParaRPr lang="en-US" sz="1050" dirty="0"/>
+          </a:p>
+        </p:txBody>
+      </p:sp>
+      <p:sp>
+        <p:nvSpPr>
+          <p:cNvPr id="21" name="Shape 18"/>
+          <p:cNvSpPr/>
+          <p:nvPr/>
+        </p:nvSpPr>
+        <p:spPr>
+          <a:xfrm>
+            <a:off x="9162288" y="4690872"/>
+            <a:ext cx="146304" cy="146304"/>
+          </a:xfrm>
+          <a:prstGeom prst="downArrow">
+            <a:avLst/>
+          </a:prstGeom>
+          <a:solidFill>
+            <a:srgbClr val="8AA2DF"/>
+          </a:solidFill>
+          <a:ln w="12700">
+            <a:solidFill>
+              <a:srgbClr val="8AA2DF"/>
+            </a:solidFill>
+            <a:prstDash val="solid"/>
+          </a:ln>
+        </p:spPr>
+      </p:sp>
+      <p:sp>
+        <p:nvSpPr>
+          <p:cNvPr id="22" name="Shape 19"/>
+          <p:cNvSpPr/>
+          <p:nvPr/>
+        </p:nvSpPr>
+        <p:spPr>
+          <a:xfrm>
+            <a:off x="7223760" y="4855464"/>
+            <a:ext cx="4206240" cy="841248"/>
+          </a:xfrm>
+          <a:prstGeom prst="roundRect">
+            <a:avLst>
+              <a:gd name="adj" fmla="val 10870"/>
+            </a:avLst>
+          </a:prstGeom>
+          <a:solidFill>
+            <a:srgbClr val="F4F5F9"/>
+          </a:solidFill>
+          <a:ln w="12700">
+            <a:solidFill>
+              <a:srgbClr val="E8EBF2"/>
+            </a:solidFill>
+            <a:prstDash val="solid"/>
+          </a:ln>
+        </p:spPr>
+      </p:sp>
+      <p:sp>
+        <p:nvSpPr>
+          <p:cNvPr id="23" name="Text 20"/>
+          <p:cNvSpPr/>
+          <p:nvPr/>
+        </p:nvSpPr>
+        <p:spPr>
+          <a:xfrm>
+            <a:off x="7452360" y="4983480"/>
+            <a:ext cx="3749040" cy="310896"/>
+          </a:xfrm>
+          <a:prstGeom prst="rect">
+            <a:avLst/>
+          </a:prstGeom>
+          <a:noFill/>
+          <a:ln/>
+        </p:spPr>
+        <p:txBody>
+          <a:bodyPr wrap="square" lIns="0" tIns="0" rIns="0" bIns="0" rtlCol="0" anchor="ctr"/>
+          <a:lstStyle/>
+          <a:p>
+            <a:pPr indent="0" marL="0">
+              <a:buNone/>
+            </a:pPr>
+            <a:r>
+              <a:rPr lang="en-US" sz="1400" b="1" dirty="0">
+                <a:solidFill>
+                  <a:srgbClr val="141A42"/>
+                </a:solidFill>
+                <a:latin typeface="Calibri" pitchFamily="34" charset="0"/>
+                <a:ea typeface="Calibri" pitchFamily="34" charset="-122"/>
+                <a:cs typeface="Calibri" pitchFamily="34" charset="-120"/>
+              </a:rPr>
+              <a:t>Confidence</a:t>
+            </a:r>
+            <a:endParaRPr lang="en-US" sz="1400" dirty="0"/>
+          </a:p>
+        </p:txBody>
+      </p:sp>
+      <p:sp>
+        <p:nvSpPr>
+          <p:cNvPr id="24" name="Text 21"/>
+          <p:cNvSpPr/>
+          <p:nvPr/>
+        </p:nvSpPr>
+        <p:spPr>
+          <a:xfrm>
+            <a:off x="7452360" y="5294376"/>
+            <a:ext cx="3749040" cy="310896"/>
+          </a:xfrm>
+          <a:prstGeom prst="rect">
+            <a:avLst/>
+          </a:prstGeom>
+          <a:noFill/>
+          <a:ln/>
+        </p:spPr>
+        <p:txBody>
+          <a:bodyPr wrap="square" lIns="0" tIns="0" rIns="0" bIns="0" rtlCol="0" anchor="ctr"/>
+          <a:lstStyle/>
+          <a:p>
+            <a:pPr indent="0" marL="0">
+              <a:buNone/>
+            </a:pPr>
+            <a:r>
+              <a:rPr lang="en-US" sz="1050" dirty="0">
+                <a:solidFill>
+                  <a:srgbClr val="6B7391"/>
+                </a:solidFill>
+                <a:latin typeface="Calibri" pitchFamily="34" charset="0"/>
+                <a:ea typeface="Calibri" pitchFamily="34" charset="-122"/>
+                <a:cs typeface="Calibri" pitchFamily="34" charset="-120"/>
+              </a:rPr>
+              <a:t>below the gate, escalate</a:t>
+            </a:r>
+            <a:endParaRPr lang="en-US" sz="1050" dirty="0"/>
+          </a:p>
+        </p:txBody>
+      </p:sp>
+      <p:sp>
+        <p:nvSpPr>
+          <p:cNvPr id="26" name="Text 22"/>
+          <p:cNvSpPr/>
+          <p:nvPr/>
+        </p:nvSpPr>
+        <p:spPr>
+          <a:xfrm>
+            <a:off x="11247120" y="6263640"/>
             <a:ext cx="457200" cy="274320"/>
           </a:xfrm>
           <a:prstGeom prst="rect">
@@ -5108,9 +6648,35 @@
           <a:chExt cx="0" cy="0"/>
         </a:xfrm>
       </p:grpSpPr>
-      <p:sp>
-        <p:nvSpPr>
-          <p:cNvPr id="2" name="Text 0"/>
+      <p:pic>
+        <p:nvPicPr>
+          <p:cNvPr id="2" name="Image 0" descr="preencoded.png">    </p:cNvPr>
+          <p:cNvPicPr>
+            <a:picLocks noChangeAspect="1"/>
+          </p:cNvPicPr>
+          <p:nvPr/>
+        </p:nvPicPr>
+        <p:blipFill>
+          <a:blip r:embed="rId1">
+            <a:alphaModFix amt="5000"/>
+          </a:blip>
+          <a:stretch>
+            <a:fillRect/>
+          </a:stretch>
+        </p:blipFill>
+        <p:spPr>
+          <a:xfrm>
+            <a:off x="9966960" y="4297680"/>
+            <a:ext cx="3291840" cy="3291840"/>
+          </a:xfrm>
+          <a:prstGeom prst="rect">
+            <a:avLst/>
+          </a:prstGeom>
+        </p:spPr>
+      </p:pic>
+      <p:sp>
+        <p:nvSpPr>
+          <p:cNvPr id="3" name="Text 0"/>
           <p:cNvSpPr/>
           <p:nvPr/>
         </p:nvSpPr>
@@ -5149,14 +6715,14 @@
       </p:sp>
       <p:sp>
         <p:nvSpPr>
-          <p:cNvPr id="3" name="Text 1"/>
+          <p:cNvPr id="4" name="Text 1"/>
           <p:cNvSpPr/>
           <p:nvPr/>
         </p:nvSpPr>
         <p:spPr>
           <a:xfrm>
             <a:off x="777240" y="1051560"/>
-            <a:ext cx="10607040" cy="1737360"/>
+            <a:ext cx="10424160" cy="1737360"/>
           </a:xfrm>
           <a:prstGeom prst="rect">
             <a:avLst/>
@@ -5209,14 +6775,14 @@
       </p:sp>
       <p:sp>
         <p:nvSpPr>
-          <p:cNvPr id="4" name="Text 2"/>
-          <p:cNvSpPr/>
-          <p:nvPr/>
-        </p:nvSpPr>
-        <p:spPr>
-          <a:xfrm>
-            <a:off x="777240" y="3017520"/>
-            <a:ext cx="9692640" cy="822960"/>
+          <p:cNvPr id="5" name="Text 2"/>
+          <p:cNvSpPr/>
+          <p:nvPr/>
+        </p:nvSpPr>
+        <p:spPr>
+          <a:xfrm>
+            <a:off x="777240" y="2971800"/>
+            <a:ext cx="9509760" cy="914400"/>
           </a:xfrm>
           <a:prstGeom prst="rect">
             <a:avLst/>
@@ -5251,13 +6817,13 @@
       </p:sp>
       <p:sp>
         <p:nvSpPr>
-          <p:cNvPr id="5" name="Text 3"/>
-          <p:cNvSpPr/>
-          <p:nvPr/>
-        </p:nvSpPr>
-        <p:spPr>
-          <a:xfrm>
-            <a:off x="777240" y="4206240"/>
+          <p:cNvPr id="6" name="Text 3"/>
+          <p:cNvSpPr/>
+          <p:nvPr/>
+        </p:nvSpPr>
+        <p:spPr>
+          <a:xfrm>
+            <a:off x="777240" y="4114800"/>
             <a:ext cx="2880360" cy="914400"/>
           </a:xfrm>
           <a:prstGeom prst="rect">
@@ -5290,13 +6856,13 @@
       </p:sp>
       <p:sp>
         <p:nvSpPr>
-          <p:cNvPr id="6" name="Text 4"/>
-          <p:cNvSpPr/>
-          <p:nvPr/>
-        </p:nvSpPr>
-        <p:spPr>
-          <a:xfrm>
-            <a:off x="777240" y="5074920"/>
+          <p:cNvPr id="7" name="Text 4"/>
+          <p:cNvSpPr/>
+          <p:nvPr/>
+        </p:nvSpPr>
+        <p:spPr>
+          <a:xfrm>
+            <a:off x="777240" y="4983480"/>
             <a:ext cx="2880360" cy="566928"/>
           </a:xfrm>
           <a:prstGeom prst="rect">
@@ -5329,13 +6895,13 @@
       </p:sp>
       <p:sp>
         <p:nvSpPr>
-          <p:cNvPr id="7" name="Text 5"/>
-          <p:cNvSpPr/>
-          <p:nvPr/>
-        </p:nvSpPr>
-        <p:spPr>
-          <a:xfrm>
-            <a:off x="3931920" y="4206240"/>
+          <p:cNvPr id="8" name="Text 5"/>
+          <p:cNvSpPr/>
+          <p:nvPr/>
+        </p:nvSpPr>
+        <p:spPr>
+          <a:xfrm>
+            <a:off x="3931920" y="4114800"/>
             <a:ext cx="2880360" cy="914400"/>
           </a:xfrm>
           <a:prstGeom prst="rect">
@@ -5368,13 +6934,13 @@
       </p:sp>
       <p:sp>
         <p:nvSpPr>
-          <p:cNvPr id="8" name="Text 6"/>
-          <p:cNvSpPr/>
-          <p:nvPr/>
-        </p:nvSpPr>
-        <p:spPr>
-          <a:xfrm>
-            <a:off x="3931920" y="5074920"/>
+          <p:cNvPr id="9" name="Text 6"/>
+          <p:cNvSpPr/>
+          <p:nvPr/>
+        </p:nvSpPr>
+        <p:spPr>
+          <a:xfrm>
+            <a:off x="3931920" y="4983480"/>
             <a:ext cx="2880360" cy="566928"/>
           </a:xfrm>
           <a:prstGeom prst="rect">
@@ -5407,13 +6973,13 @@
       </p:sp>
       <p:sp>
         <p:nvSpPr>
-          <p:cNvPr id="9" name="Text 7"/>
-          <p:cNvSpPr/>
-          <p:nvPr/>
-        </p:nvSpPr>
-        <p:spPr>
-          <a:xfrm>
-            <a:off x="7086600" y="4206240"/>
+          <p:cNvPr id="10" name="Text 7"/>
+          <p:cNvSpPr/>
+          <p:nvPr/>
+        </p:nvSpPr>
+        <p:spPr>
+          <a:xfrm>
+            <a:off x="7086600" y="4114800"/>
             <a:ext cx="2880360" cy="914400"/>
           </a:xfrm>
           <a:prstGeom prst="rect">
@@ -5446,13 +7012,13 @@
       </p:sp>
       <p:sp>
         <p:nvSpPr>
-          <p:cNvPr id="10" name="Text 8"/>
-          <p:cNvSpPr/>
-          <p:nvPr/>
-        </p:nvSpPr>
-        <p:spPr>
-          <a:xfrm>
-            <a:off x="7086600" y="5074920"/>
+          <p:cNvPr id="11" name="Text 8"/>
+          <p:cNvSpPr/>
+          <p:nvPr/>
+        </p:nvSpPr>
+        <p:spPr>
+          <a:xfrm>
+            <a:off x="7086600" y="4983480"/>
             <a:ext cx="2880360" cy="566928"/>
           </a:xfrm>
           <a:prstGeom prst="rect">
@@ -5485,14 +7051,14 @@
       </p:sp>
       <p:sp>
         <p:nvSpPr>
-          <p:cNvPr id="11" name="Text 9"/>
-          <p:cNvSpPr/>
-          <p:nvPr/>
-        </p:nvSpPr>
-        <p:spPr>
-          <a:xfrm>
-            <a:off x="777240" y="5715000"/>
-            <a:ext cx="9692640" cy="822960"/>
+          <p:cNvPr id="12" name="Text 9"/>
+          <p:cNvSpPr/>
+          <p:nvPr/>
+        </p:nvSpPr>
+        <p:spPr>
+          <a:xfrm>
+            <a:off x="777240" y="5623560"/>
+            <a:ext cx="9509760" cy="548640"/>
           </a:xfrm>
           <a:prstGeom prst="rect">
             <a:avLst/>
@@ -5527,13 +7093,13 @@
       </p:sp>
       <p:sp>
         <p:nvSpPr>
-          <p:cNvPr id="13" name="Text 10"/>
-          <p:cNvSpPr/>
-          <p:nvPr/>
-        </p:nvSpPr>
-        <p:spPr>
-          <a:xfrm>
-            <a:off x="11155680" y="6172200"/>
+          <p:cNvPr id="14" name="Text 10"/>
+          <p:cNvSpPr/>
+          <p:nvPr/>
+        </p:nvSpPr>
+        <p:spPr>
+          <a:xfrm>
+            <a:off x="11247120" y="6263640"/>
             <a:ext cx="457200" cy="274320"/>
           </a:xfrm>
           <a:prstGeom prst="rect">
@@ -5596,9 +7162,35 @@
           <a:chExt cx="0" cy="0"/>
         </a:xfrm>
       </p:grpSpPr>
-      <p:sp>
-        <p:nvSpPr>
-          <p:cNvPr id="2" name="Text 0"/>
+      <p:pic>
+        <p:nvPicPr>
+          <p:cNvPr id="2" name="Image 0" descr="preencoded.png">    </p:cNvPr>
+          <p:cNvPicPr>
+            <a:picLocks noChangeAspect="1"/>
+          </p:cNvPicPr>
+          <p:nvPr/>
+        </p:nvPicPr>
+        <p:blipFill>
+          <a:blip r:embed="rId1">
+            <a:alphaModFix amt="5000"/>
+          </a:blip>
+          <a:stretch>
+            <a:fillRect/>
+          </a:stretch>
+        </p:blipFill>
+        <p:spPr>
+          <a:xfrm>
+            <a:off x="9966960" y="4297680"/>
+            <a:ext cx="3291840" cy="3291840"/>
+          </a:xfrm>
+          <a:prstGeom prst="rect">
+            <a:avLst/>
+          </a:prstGeom>
+        </p:spPr>
+      </p:pic>
+      <p:sp>
+        <p:nvSpPr>
+          <p:cNvPr id="3" name="Text 0"/>
           <p:cNvSpPr/>
           <p:nvPr/>
         </p:nvSpPr>
@@ -5637,14 +7229,14 @@
       </p:sp>
       <p:sp>
         <p:nvSpPr>
-          <p:cNvPr id="3" name="Text 1"/>
+          <p:cNvPr id="4" name="Text 1"/>
           <p:cNvSpPr/>
           <p:nvPr/>
         </p:nvSpPr>
         <p:spPr>
           <a:xfrm>
             <a:off x="777240" y="1051560"/>
-            <a:ext cx="10607040" cy="1737360"/>
+            <a:ext cx="6309360" cy="1737360"/>
           </a:xfrm>
           <a:prstGeom prst="rect">
             <a:avLst/>
@@ -5697,14 +7289,14 @@
       </p:sp>
       <p:sp>
         <p:nvSpPr>
-          <p:cNvPr id="4" name="Text 2"/>
-          <p:cNvSpPr/>
-          <p:nvPr/>
-        </p:nvSpPr>
-        <p:spPr>
-          <a:xfrm>
-            <a:off x="777240" y="3017520"/>
-            <a:ext cx="9509760" cy="822960"/>
+          <p:cNvPr id="5" name="Text 2"/>
+          <p:cNvSpPr/>
+          <p:nvPr/>
+        </p:nvSpPr>
+        <p:spPr>
+          <a:xfrm>
+            <a:off x="777240" y="2971800"/>
+            <a:ext cx="5943600" cy="822960"/>
           </a:xfrm>
           <a:prstGeom prst="rect">
             <a:avLst/>
@@ -5739,14 +7331,14 @@
       </p:sp>
       <p:sp>
         <p:nvSpPr>
-          <p:cNvPr id="5" name="Shape 3"/>
-          <p:cNvSpPr/>
-          <p:nvPr/>
-        </p:nvSpPr>
-        <p:spPr>
-          <a:xfrm>
-            <a:off x="777240" y="3931920"/>
-            <a:ext cx="9509760" cy="1417320"/>
+          <p:cNvPr id="6" name="Shape 3"/>
+          <p:cNvSpPr/>
+          <p:nvPr/>
+        </p:nvSpPr>
+        <p:spPr>
+          <a:xfrm>
+            <a:off x="777240" y="3977640"/>
+            <a:ext cx="9326880" cy="1417320"/>
           </a:xfrm>
           <a:prstGeom prst="roundRect">
             <a:avLst>
@@ -5766,14 +7358,53 @@
       </p:sp>
       <p:sp>
         <p:nvSpPr>
-          <p:cNvPr id="6" name="Text 4"/>
-          <p:cNvSpPr/>
-          <p:nvPr/>
-        </p:nvSpPr>
-        <p:spPr>
-          <a:xfrm>
-            <a:off x="1143000" y="4133088"/>
-            <a:ext cx="8778240" cy="731520"/>
+          <p:cNvPr id="7" name="Text 4"/>
+          <p:cNvSpPr/>
+          <p:nvPr/>
+        </p:nvSpPr>
+        <p:spPr>
+          <a:xfrm>
+            <a:off x="941832" y="3995928"/>
+            <a:ext cx="548640" cy="640080"/>
+          </a:xfrm>
+          <a:prstGeom prst="rect">
+            <a:avLst/>
+          </a:prstGeom>
+          <a:noFill/>
+          <a:ln/>
+        </p:spPr>
+        <p:txBody>
+          <a:bodyPr wrap="square" lIns="0" tIns="0" rIns="0" bIns="0" rtlCol="0" anchor="ctr"/>
+          <a:lstStyle/>
+          <a:p>
+            <a:pPr indent="0" marL="0">
+              <a:buNone/>
+            </a:pPr>
+            <a:r>
+              <a:rPr lang="en-US" sz="4400" b="1" dirty="0">
+                <a:solidFill>
+                  <a:srgbClr val="8AA2DF"/>
+                </a:solidFill>
+                <a:latin typeface="Cambria" pitchFamily="34" charset="0"/>
+                <a:ea typeface="Cambria" pitchFamily="34" charset="-122"/>
+                <a:cs typeface="Cambria" pitchFamily="34" charset="-120"/>
+              </a:rPr>
+              <a:t>“</a:t>
+            </a:r>
+            <a:endParaRPr lang="en-US" sz="4400" dirty="0"/>
+          </a:p>
+        </p:txBody>
+      </p:sp>
+      <p:sp>
+        <p:nvSpPr>
+          <p:cNvPr id="8" name="Text 5"/>
+          <p:cNvSpPr/>
+          <p:nvPr/>
+        </p:nvSpPr>
+        <p:spPr>
+          <a:xfrm>
+            <a:off x="1435608" y="4197096"/>
+            <a:ext cx="8412480" cy="713232"/>
           </a:xfrm>
           <a:prstGeom prst="rect">
             <a:avLst/>
@@ -5800,7 +7431,7 @@
                 <a:ea typeface="Calibri" pitchFamily="34" charset="-122"/>
                 <a:cs typeface="Calibri" pitchFamily="34" charset="-120"/>
               </a:rPr>
-              <a:t>"Ask it something outside what the agents actually observed and it says: I can’t answer that from agent data, so I won’t guess."</a:t>
+              <a:t>Ask it something outside what the agents actually observed and it says: I can’t answer that from agent data, so I won’t guess.</a:t>
             </a:r>
             <a:endParaRPr lang="en-US" sz="1500" dirty="0"/>
           </a:p>
@@ -5808,14 +7439,14 @@
       </p:sp>
       <p:sp>
         <p:nvSpPr>
-          <p:cNvPr id="7" name="Text 5"/>
-          <p:cNvSpPr/>
-          <p:nvPr/>
-        </p:nvSpPr>
-        <p:spPr>
-          <a:xfrm>
-            <a:off x="1143000" y="4901184"/>
-            <a:ext cx="8778240" cy="274320"/>
+          <p:cNvPr id="9" name="Text 6"/>
+          <p:cNvSpPr/>
+          <p:nvPr/>
+        </p:nvSpPr>
+        <p:spPr>
+          <a:xfrm>
+            <a:off x="1435608" y="4946904"/>
+            <a:ext cx="8412480" cy="274320"/>
           </a:xfrm>
           <a:prstGeom prst="rect">
             <a:avLst/>
@@ -5847,14 +7478,14 @@
       </p:sp>
       <p:sp>
         <p:nvSpPr>
-          <p:cNvPr id="8" name="Text 6"/>
-          <p:cNvSpPr/>
-          <p:nvPr/>
-        </p:nvSpPr>
-        <p:spPr>
-          <a:xfrm>
-            <a:off x="777240" y="5577840"/>
-            <a:ext cx="9692640" cy="822960"/>
+          <p:cNvPr id="10" name="Text 7"/>
+          <p:cNvSpPr/>
+          <p:nvPr/>
+        </p:nvSpPr>
+        <p:spPr>
+          <a:xfrm>
+            <a:off x="777240" y="5669280"/>
+            <a:ext cx="5943600" cy="457200"/>
           </a:xfrm>
           <a:prstGeom prst="rect">
             <a:avLst/>
@@ -5873,7 +7504,73 @@
               <a:buNone/>
             </a:pPr>
             <a:r>
-              <a:rPr lang="en-US" sz="1400" dirty="0">
+              <a:rPr lang="en-US" sz="1700" b="1" dirty="0">
+                <a:solidFill>
+                  <a:srgbClr val="141A42"/>
+                </a:solidFill>
+                <a:latin typeface="Calibri" pitchFamily="34" charset="0"/>
+                <a:ea typeface="Calibri" pitchFamily="34" charset="-122"/>
+                <a:cs typeface="Calibri" pitchFamily="34" charset="-120"/>
+              </a:rPr>
+              <a:t>A dash is honest. A zero is a claim.</a:t>
+            </a:r>
+            <a:endParaRPr lang="en-US" sz="1700" dirty="0"/>
+          </a:p>
+        </p:txBody>
+      </p:sp>
+      <p:sp>
+        <p:nvSpPr>
+          <p:cNvPr id="11" name="Shape 8"/>
+          <p:cNvSpPr/>
+          <p:nvPr/>
+        </p:nvSpPr>
+        <p:spPr>
+          <a:xfrm>
+            <a:off x="7406640" y="1417320"/>
+            <a:ext cx="4023360" cy="2103120"/>
+          </a:xfrm>
+          <a:prstGeom prst="roundRect">
+            <a:avLst>
+              <a:gd name="adj" fmla="val 5217"/>
+            </a:avLst>
+          </a:prstGeom>
+          <a:solidFill>
+            <a:srgbClr val="F4F5F9"/>
+          </a:solidFill>
+          <a:ln w="12700">
+            <a:solidFill>
+              <a:srgbClr val="E8EBF2"/>
+            </a:solidFill>
+            <a:prstDash val="solid"/>
+          </a:ln>
+        </p:spPr>
+      </p:sp>
+      <p:sp>
+        <p:nvSpPr>
+          <p:cNvPr id="12" name="Text 9"/>
+          <p:cNvSpPr/>
+          <p:nvPr/>
+        </p:nvSpPr>
+        <p:spPr>
+          <a:xfrm>
+            <a:off x="7726680" y="1691640"/>
+            <a:ext cx="3383280" cy="274320"/>
+          </a:xfrm>
+          <a:prstGeom prst="rect">
+            <a:avLst/>
+          </a:prstGeom>
+          <a:noFill/>
+          <a:ln/>
+        </p:spPr>
+        <p:txBody>
+          <a:bodyPr wrap="square" lIns="0" tIns="0" rIns="0" bIns="0" rtlCol="0" anchor="ctr"/>
+          <a:lstStyle/>
+          <a:p>
+            <a:pPr indent="0" marL="0">
+              <a:buNone/>
+            </a:pPr>
+            <a:r>
+              <a:rPr lang="en-US" sz="1050" b="1" spc="150" kern="0" dirty="0">
                 <a:solidFill>
                   <a:srgbClr val="6B7391"/>
                 </a:solidFill>
@@ -5881,21 +7578,99 @@
                 <a:ea typeface="Calibri" pitchFamily="34" charset="-122"/>
                 <a:cs typeface="Calibri" pitchFamily="34" charset="-120"/>
               </a:rPr>
-              <a:t>A dash is honest. A zero is a claim. Round 1 caught the platform’s own chat summaries inventing ticket numbers while its audit log said otherwise. That is the failure this design is built against.</a:t>
-            </a:r>
-            <a:endParaRPr lang="en-US" sz="1400" dirty="0"/>
-          </a:p>
-        </p:txBody>
-      </p:sp>
-      <p:sp>
-        <p:nvSpPr>
-          <p:cNvPr id="10" name="Text 7"/>
-          <p:cNvSpPr/>
-          <p:nvPr/>
-        </p:nvSpPr>
-        <p:spPr>
-          <a:xfrm>
-            <a:off x="11155680" y="6172200"/>
+              <a:t>MTTR</a:t>
+            </a:r>
+            <a:endParaRPr lang="en-US" sz="1050" dirty="0"/>
+          </a:p>
+        </p:txBody>
+      </p:sp>
+      <p:sp>
+        <p:nvSpPr>
+          <p:cNvPr id="13" name="Text 10"/>
+          <p:cNvSpPr/>
+          <p:nvPr/>
+        </p:nvSpPr>
+        <p:spPr>
+          <a:xfrm>
+            <a:off x="7726680" y="1965960"/>
+            <a:ext cx="3383280" cy="822960"/>
+          </a:xfrm>
+          <a:prstGeom prst="rect">
+            <a:avLst/>
+          </a:prstGeom>
+          <a:noFill/>
+          <a:ln/>
+        </p:spPr>
+        <p:txBody>
+          <a:bodyPr wrap="square" lIns="0" tIns="0" rIns="0" bIns="0" rtlCol="0" anchor="ctr"/>
+          <a:lstStyle/>
+          <a:p>
+            <a:pPr indent="0" marL="0">
+              <a:buNone/>
+            </a:pPr>
+            <a:r>
+              <a:rPr lang="en-US" sz="5400" b="1" dirty="0">
+                <a:solidFill>
+                  <a:srgbClr val="B4B9CC"/>
+                </a:solidFill>
+                <a:latin typeface="Calibri" pitchFamily="34" charset="0"/>
+                <a:ea typeface="Calibri" pitchFamily="34" charset="-122"/>
+                <a:cs typeface="Calibri" pitchFamily="34" charset="-120"/>
+              </a:rPr>
+              <a:t>—</a:t>
+            </a:r>
+            <a:endParaRPr lang="en-US" sz="5400" dirty="0"/>
+          </a:p>
+        </p:txBody>
+      </p:sp>
+      <p:sp>
+        <p:nvSpPr>
+          <p:cNvPr id="14" name="Text 11"/>
+          <p:cNvSpPr/>
+          <p:nvPr/>
+        </p:nvSpPr>
+        <p:spPr>
+          <a:xfrm>
+            <a:off x="7726680" y="2834640"/>
+            <a:ext cx="3383280" cy="457200"/>
+          </a:xfrm>
+          <a:prstGeom prst="rect">
+            <a:avLst/>
+          </a:prstGeom>
+          <a:noFill/>
+          <a:ln/>
+        </p:spPr>
+        <p:txBody>
+          <a:bodyPr wrap="square" lIns="0" tIns="0" rIns="0" bIns="0" rtlCol="0" anchor="ctr"/>
+          <a:lstStyle/>
+          <a:p>
+            <a:pPr indent="0" marL="0">
+              <a:buNone/>
+            </a:pPr>
+            <a:r>
+              <a:rPr lang="en-US" sz="1100" dirty="0">
+                <a:solidFill>
+                  <a:srgbClr val="6B7391"/>
+                </a:solidFill>
+                <a:latin typeface="Calibri" pitchFamily="34" charset="0"/>
+                <a:ea typeface="Calibri" pitchFamily="34" charset="-122"/>
+                <a:cs typeface="Calibri" pitchFamily="34" charset="-120"/>
+              </a:rPr>
+              <a:t>no Operator reports resolution timestamps</a:t>
+            </a:r>
+            <a:endParaRPr lang="en-US" sz="1100" dirty="0"/>
+          </a:p>
+        </p:txBody>
+      </p:sp>
+      <p:sp>
+        <p:nvSpPr>
+          <p:cNvPr id="16" name="Text 12"/>
+          <p:cNvSpPr/>
+          <p:nvPr/>
+        </p:nvSpPr>
+        <p:spPr>
+          <a:xfrm>
+            <a:off x="11247120" y="6263640"/>
             <a:ext cx="457200" cy="274320"/>
           </a:xfrm>
           <a:prstGeom prst="rect">
@@ -5958,9 +7733,35 @@
           <a:chExt cx="0" cy="0"/>
         </a:xfrm>
       </p:grpSpPr>
-      <p:sp>
-        <p:nvSpPr>
-          <p:cNvPr id="2" name="Text 0"/>
+      <p:pic>
+        <p:nvPicPr>
+          <p:cNvPr id="2" name="Image 0" descr="preencoded.png">    </p:cNvPr>
+          <p:cNvPicPr>
+            <a:picLocks noChangeAspect="1"/>
+          </p:cNvPicPr>
+          <p:nvPr/>
+        </p:nvPicPr>
+        <p:blipFill>
+          <a:blip r:embed="rId1">
+            <a:alphaModFix amt="8000"/>
+          </a:blip>
+          <a:stretch>
+            <a:fillRect/>
+          </a:stretch>
+        </p:blipFill>
+        <p:spPr>
+          <a:xfrm>
+            <a:off x="9966960" y="4297680"/>
+            <a:ext cx="3291840" cy="3291840"/>
+          </a:xfrm>
+          <a:prstGeom prst="rect">
+            <a:avLst/>
+          </a:prstGeom>
+        </p:spPr>
+      </p:pic>
+      <p:sp>
+        <p:nvSpPr>
+          <p:cNvPr id="3" name="Text 0"/>
           <p:cNvSpPr/>
           <p:nvPr/>
         </p:nvSpPr>
@@ -5999,14 +7800,14 @@
       </p:sp>
       <p:sp>
         <p:nvSpPr>
-          <p:cNvPr id="3" name="Text 1"/>
-          <p:cNvSpPr/>
-          <p:nvPr/>
-        </p:nvSpPr>
-        <p:spPr>
-          <a:xfrm>
-            <a:off x="777240" y="1051560"/>
-            <a:ext cx="10607040" cy="1554480"/>
+          <p:cNvPr id="4" name="Text 1"/>
+          <p:cNvSpPr/>
+          <p:nvPr/>
+        </p:nvSpPr>
+        <p:spPr>
+          <a:xfrm>
+            <a:off x="777240" y="1005840"/>
+            <a:ext cx="10424160" cy="731520"/>
           </a:xfrm>
           <a:prstGeom prst="rect">
             <a:avLst/>
@@ -6019,13 +7820,168 @@
           <a:lstStyle/>
           <a:p>
             <a:pPr indent="0" marL="0">
+              <a:buNone/>
+            </a:pPr>
+            <a:r>
+              <a:rPr lang="en-US" sz="3400" b="1" dirty="0">
+                <a:solidFill>
+                  <a:srgbClr val="FFFFFF"/>
+                </a:solidFill>
+                <a:latin typeface="Calibri" pitchFamily="34" charset="0"/>
+                <a:ea typeface="Calibri" pitchFamily="34" charset="-122"/>
+                <a:cs typeface="Calibri" pitchFamily="34" charset="-120"/>
+              </a:rPr>
+              <a:t>One Orchestrator. Seven Operators.</a:t>
+            </a:r>
+            <a:endParaRPr lang="en-US" sz="3400" dirty="0"/>
+          </a:p>
+        </p:txBody>
+      </p:sp>
+      <p:sp>
+        <p:nvSpPr>
+          <p:cNvPr id="5" name="Shape 2"/>
+          <p:cNvSpPr/>
+          <p:nvPr/>
+        </p:nvSpPr>
+        <p:spPr>
+          <a:xfrm>
+            <a:off x="4160520" y="1965960"/>
+            <a:ext cx="3840480" cy="777240"/>
+          </a:xfrm>
+          <a:prstGeom prst="roundRect">
+            <a:avLst>
+              <a:gd name="adj" fmla="val 14118"/>
+            </a:avLst>
+          </a:prstGeom>
+          <a:solidFill>
+            <a:srgbClr val="8AA2DF"/>
+          </a:solidFill>
+          <a:ln w="12700">
+            <a:solidFill>
+              <a:srgbClr val="8AA2DF"/>
+            </a:solidFill>
+            <a:prstDash val="solid"/>
+          </a:ln>
+        </p:spPr>
+      </p:sp>
+      <p:sp>
+        <p:nvSpPr>
+          <p:cNvPr id="6" name="Text 3"/>
+          <p:cNvSpPr/>
+          <p:nvPr/>
+        </p:nvSpPr>
+        <p:spPr>
+          <a:xfrm>
+            <a:off x="4160520" y="1965960"/>
+            <a:ext cx="3840480" cy="777240"/>
+          </a:xfrm>
+          <a:prstGeom prst="rect">
+            <a:avLst/>
+          </a:prstGeom>
+          <a:noFill/>
+          <a:ln/>
+        </p:spPr>
+        <p:txBody>
+          <a:bodyPr wrap="square" lIns="0" tIns="0" rIns="0" bIns="0" rtlCol="0" anchor="ctr"/>
+          <a:lstStyle/>
+          <a:p>
+            <a:pPr algn="ctr" indent="0" marL="0">
+              <a:buNone/>
+            </a:pPr>
+            <a:r>
+              <a:rPr lang="en-US" sz="1500" b="1" dirty="0">
+                <a:solidFill>
+                  <a:srgbClr val="141A42"/>
+                </a:solidFill>
+                <a:latin typeface="Calibri" pitchFamily="34" charset="0"/>
+                <a:ea typeface="Calibri" pitchFamily="34" charset="-122"/>
+                <a:cs typeface="Calibri" pitchFamily="34" charset="-120"/>
+              </a:rPr>
+              <a:t>Service Desk Orchestrator</a:t>
+            </a:r>
+            <a:endParaRPr lang="en-US" sz="1500" dirty="0"/>
+          </a:p>
+        </p:txBody>
+      </p:sp>
+      <p:sp>
+        <p:nvSpPr>
+          <p:cNvPr id="7" name="Shape 4"/>
+          <p:cNvSpPr/>
+          <p:nvPr/>
+        </p:nvSpPr>
+        <p:spPr>
+          <a:xfrm>
+            <a:off x="6080760" y="2743200"/>
+            <a:ext cx="0" cy="384048"/>
+          </a:xfrm>
+          <a:prstGeom prst="line">
+            <a:avLst/>
+          </a:prstGeom>
+          <a:noFill/>
+          <a:ln w="19050">
+            <a:solidFill>
+              <a:srgbClr val="3E4780"/>
+            </a:solidFill>
+            <a:prstDash val="solid"/>
+          </a:ln>
+        </p:spPr>
+      </p:sp>
+      <p:sp>
+        <p:nvSpPr>
+          <p:cNvPr id="8" name="Shape 5"/>
+          <p:cNvSpPr/>
+          <p:nvPr/>
+        </p:nvSpPr>
+        <p:spPr>
+          <a:xfrm>
+            <a:off x="2884932" y="3127248"/>
+            <a:ext cx="1481328" cy="896112"/>
+          </a:xfrm>
+          <a:prstGeom prst="roundRect">
+            <a:avLst>
+              <a:gd name="adj" fmla="val 10204"/>
+            </a:avLst>
+          </a:prstGeom>
+          <a:solidFill>
+            <a:srgbClr val="1E2551"/>
+          </a:solidFill>
+          <a:ln w="12700">
+            <a:solidFill>
+              <a:srgbClr val="2E3768"/>
+            </a:solidFill>
+            <a:prstDash val="solid"/>
+          </a:ln>
+        </p:spPr>
+      </p:sp>
+      <p:sp>
+        <p:nvSpPr>
+          <p:cNvPr id="9" name="Text 6"/>
+          <p:cNvSpPr/>
+          <p:nvPr/>
+        </p:nvSpPr>
+        <p:spPr>
+          <a:xfrm>
+            <a:off x="2884932" y="3127248"/>
+            <a:ext cx="1481328" cy="896112"/>
+          </a:xfrm>
+          <a:prstGeom prst="rect">
+            <a:avLst/>
+          </a:prstGeom>
+          <a:noFill/>
+          <a:ln/>
+        </p:spPr>
+        <p:txBody>
+          <a:bodyPr wrap="square" lIns="0" tIns="0" rIns="0" bIns="0" rtlCol="0" anchor="ctr"/>
+          <a:lstStyle/>
+          <a:p>
+            <a:pPr algn="ctr" indent="0" marL="0">
               <a:lnSpc>
-                <a:spcPts val="4600"/>
+                <a:spcPts val="1400"/>
               </a:lnSpc>
               <a:buNone/>
             </a:pPr>
             <a:r>
-              <a:rPr lang="en-US" sz="4000" b="1" dirty="0">
+              <a:rPr lang="en-US" sz="1150" dirty="0">
                 <a:solidFill>
                   <a:srgbClr val="FFFFFF"/>
                 </a:solidFill>
@@ -6033,19 +7989,68 @@
                 <a:ea typeface="Calibri" pitchFamily="34" charset="-122"/>
                 <a:cs typeface="Calibri" pitchFamily="34" charset="-120"/>
               </a:rPr>
-              <a:t>One Orchestrator.</a:t>
-            </a:r>
-            <a:endParaRPr lang="en-US" sz="4000" dirty="0"/>
-          </a:p>
-          <a:p>
-            <a:pPr indent="0" marL="0">
+              <a:t>Triage</a:t>
+            </a:r>
+            <a:endParaRPr lang="en-US" sz="1150" dirty="0"/>
+          </a:p>
+        </p:txBody>
+      </p:sp>
+      <p:sp>
+        <p:nvSpPr>
+          <p:cNvPr id="10" name="Shape 7"/>
+          <p:cNvSpPr/>
+          <p:nvPr/>
+        </p:nvSpPr>
+        <p:spPr>
+          <a:xfrm>
+            <a:off x="4530852" y="3127248"/>
+            <a:ext cx="1481328" cy="896112"/>
+          </a:xfrm>
+          <a:prstGeom prst="roundRect">
+            <a:avLst>
+              <a:gd name="adj" fmla="val 10204"/>
+            </a:avLst>
+          </a:prstGeom>
+          <a:solidFill>
+            <a:srgbClr val="1E2551"/>
+          </a:solidFill>
+          <a:ln w="12700">
+            <a:solidFill>
+              <a:srgbClr val="2E3768"/>
+            </a:solidFill>
+            <a:prstDash val="solid"/>
+          </a:ln>
+        </p:spPr>
+      </p:sp>
+      <p:sp>
+        <p:nvSpPr>
+          <p:cNvPr id="11" name="Text 8"/>
+          <p:cNvSpPr/>
+          <p:nvPr/>
+        </p:nvSpPr>
+        <p:spPr>
+          <a:xfrm>
+            <a:off x="4530852" y="3127248"/>
+            <a:ext cx="1481328" cy="896112"/>
+          </a:xfrm>
+          <a:prstGeom prst="rect">
+            <a:avLst/>
+          </a:prstGeom>
+          <a:noFill/>
+          <a:ln/>
+        </p:spPr>
+        <p:txBody>
+          <a:bodyPr wrap="square" lIns="0" tIns="0" rIns="0" bIns="0" rtlCol="0" anchor="ctr"/>
+          <a:lstStyle/>
+          <a:p>
+            <a:pPr algn="ctr" indent="0" marL="0">
               <a:lnSpc>
-                <a:spcPts val="4600"/>
+                <a:spcPts val="1400"/>
               </a:lnSpc>
               <a:buNone/>
             </a:pPr>
             <a:r>
-              <a:rPr lang="en-US" sz="4000" b="1" dirty="0">
+              <a:rPr lang="en-US" sz="1150" dirty="0">
                 <a:solidFill>
                   <a:srgbClr val="FFFFFF"/>
                 </a:solidFill>
@@ -6053,22 +8058,49 @@
                 <a:ea typeface="Calibri" pitchFamily="34" charset="-122"/>
                 <a:cs typeface="Calibri" pitchFamily="34" charset="-120"/>
               </a:rPr>
-              <a:t>Seven Operators.</a:t>
-            </a:r>
-            <a:endParaRPr lang="en-US" sz="4000" dirty="0"/>
-          </a:p>
-        </p:txBody>
-      </p:sp>
-      <p:sp>
-        <p:nvSpPr>
-          <p:cNvPr id="4" name="Text 2"/>
-          <p:cNvSpPr/>
-          <p:nvPr/>
-        </p:nvSpPr>
-        <p:spPr>
-          <a:xfrm>
-            <a:off x="777240" y="2880360"/>
-            <a:ext cx="9692640" cy="1005840"/>
+              <a:t>Correlator</a:t>
+            </a:r>
+            <a:endParaRPr lang="en-US" sz="1150" dirty="0"/>
+          </a:p>
+        </p:txBody>
+      </p:sp>
+      <p:sp>
+        <p:nvSpPr>
+          <p:cNvPr id="12" name="Shape 9"/>
+          <p:cNvSpPr/>
+          <p:nvPr/>
+        </p:nvSpPr>
+        <p:spPr>
+          <a:xfrm>
+            <a:off x="6176772" y="3127248"/>
+            <a:ext cx="1481328" cy="896112"/>
+          </a:xfrm>
+          <a:prstGeom prst="roundRect">
+            <a:avLst>
+              <a:gd name="adj" fmla="val 10204"/>
+            </a:avLst>
+          </a:prstGeom>
+          <a:solidFill>
+            <a:srgbClr val="1E2551"/>
+          </a:solidFill>
+          <a:ln w="12700">
+            <a:solidFill>
+              <a:srgbClr val="2E3768"/>
+            </a:solidFill>
+            <a:prstDash val="solid"/>
+          </a:ln>
+        </p:spPr>
+      </p:sp>
+      <p:sp>
+        <p:nvSpPr>
+          <p:cNvPr id="13" name="Text 10"/>
+          <p:cNvSpPr/>
+          <p:nvPr/>
+        </p:nvSpPr>
+        <p:spPr>
+          <a:xfrm>
+            <a:off x="6176772" y="3127248"/>
+            <a:ext cx="1481328" cy="896112"/>
           </a:xfrm>
           <a:prstGeom prst="rect">
             <a:avLst/>
@@ -6080,14 +8112,491 @@
           <a:bodyPr wrap="square" lIns="0" tIns="0" rIns="0" bIns="0" rtlCol="0" anchor="ctr"/>
           <a:lstStyle/>
           <a:p>
-            <a:pPr indent="0" marL="0">
+            <a:pPr algn="ctr" indent="0" marL="0">
               <a:lnSpc>
-                <a:spcPts val="2600"/>
+                <a:spcPts val="1400"/>
               </a:lnSpc>
               <a:buNone/>
             </a:pPr>
             <a:r>
-              <a:rPr lang="en-US" sz="1700" dirty="0">
+              <a:rPr lang="en-US" sz="1150" dirty="0">
+                <a:solidFill>
+                  <a:srgbClr val="FFFFFF"/>
+                </a:solidFill>
+                <a:latin typeface="Calibri" pitchFamily="34" charset="0"/>
+                <a:ea typeface="Calibri" pitchFamily="34" charset="-122"/>
+                <a:cs typeface="Calibri" pitchFamily="34" charset="-120"/>
+              </a:rPr>
+              <a:t>Evidence</a:t>
+            </a:r>
+            <a:endParaRPr lang="en-US" sz="1150" dirty="0"/>
+          </a:p>
+          <a:p>
+            <a:pPr algn="ctr" indent="0" marL="0">
+              <a:lnSpc>
+                <a:spcPts val="1400"/>
+              </a:lnSpc>
+              <a:buNone/>
+            </a:pPr>
+            <a:r>
+              <a:rPr lang="en-US" sz="1150" dirty="0">
+                <a:solidFill>
+                  <a:srgbClr val="FFFFFF"/>
+                </a:solidFill>
+                <a:latin typeface="Calibri" pitchFamily="34" charset="0"/>
+                <a:ea typeface="Calibri" pitchFamily="34" charset="-122"/>
+                <a:cs typeface="Calibri" pitchFamily="34" charset="-120"/>
+              </a:rPr>
+              <a:t>&amp; Policy</a:t>
+            </a:r>
+            <a:endParaRPr lang="en-US" sz="1150" dirty="0"/>
+          </a:p>
+        </p:txBody>
+      </p:sp>
+      <p:sp>
+        <p:nvSpPr>
+          <p:cNvPr id="14" name="Shape 11"/>
+          <p:cNvSpPr/>
+          <p:nvPr/>
+        </p:nvSpPr>
+        <p:spPr>
+          <a:xfrm>
+            <a:off x="7822692" y="3127248"/>
+            <a:ext cx="1481328" cy="896112"/>
+          </a:xfrm>
+          <a:prstGeom prst="roundRect">
+            <a:avLst>
+              <a:gd name="adj" fmla="val 10204"/>
+            </a:avLst>
+          </a:prstGeom>
+          <a:solidFill>
+            <a:srgbClr val="1E2551"/>
+          </a:solidFill>
+          <a:ln w="12700">
+            <a:solidFill>
+              <a:srgbClr val="2E3768"/>
+            </a:solidFill>
+            <a:prstDash val="solid"/>
+          </a:ln>
+        </p:spPr>
+      </p:sp>
+      <p:sp>
+        <p:nvSpPr>
+          <p:cNvPr id="15" name="Text 12"/>
+          <p:cNvSpPr/>
+          <p:nvPr/>
+        </p:nvSpPr>
+        <p:spPr>
+          <a:xfrm>
+            <a:off x="7822692" y="3127248"/>
+            <a:ext cx="1481328" cy="896112"/>
+          </a:xfrm>
+          <a:prstGeom prst="rect">
+            <a:avLst/>
+          </a:prstGeom>
+          <a:noFill/>
+          <a:ln/>
+        </p:spPr>
+        <p:txBody>
+          <a:bodyPr wrap="square" lIns="0" tIns="0" rIns="0" bIns="0" rtlCol="0" anchor="ctr"/>
+          <a:lstStyle/>
+          <a:p>
+            <a:pPr algn="ctr" indent="0" marL="0">
+              <a:lnSpc>
+                <a:spcPts val="1400"/>
+              </a:lnSpc>
+              <a:buNone/>
+            </a:pPr>
+            <a:r>
+              <a:rPr lang="en-US" sz="1150" dirty="0">
+                <a:solidFill>
+                  <a:srgbClr val="FFFFFF"/>
+                </a:solidFill>
+                <a:latin typeface="Calibri" pitchFamily="34" charset="0"/>
+                <a:ea typeface="Calibri" pitchFamily="34" charset="-122"/>
+                <a:cs typeface="Calibri" pitchFamily="34" charset="-120"/>
+              </a:rPr>
+              <a:t>Change</a:t>
+            </a:r>
+            <a:endParaRPr lang="en-US" sz="1150" dirty="0"/>
+          </a:p>
+          <a:p>
+            <a:pPr algn="ctr" indent="0" marL="0">
+              <a:lnSpc>
+                <a:spcPts val="1400"/>
+              </a:lnSpc>
+              <a:buNone/>
+            </a:pPr>
+            <a:r>
+              <a:rPr lang="en-US" sz="1150" dirty="0">
+                <a:solidFill>
+                  <a:srgbClr val="FFFFFF"/>
+                </a:solidFill>
+                <a:latin typeface="Calibri" pitchFamily="34" charset="0"/>
+                <a:ea typeface="Calibri" pitchFamily="34" charset="-122"/>
+                <a:cs typeface="Calibri" pitchFamily="34" charset="-120"/>
+              </a:rPr>
+              <a:t>Approval</a:t>
+            </a:r>
+            <a:endParaRPr lang="en-US" sz="1150" dirty="0"/>
+          </a:p>
+        </p:txBody>
+      </p:sp>
+      <p:sp>
+        <p:nvSpPr>
+          <p:cNvPr id="16" name="Shape 13"/>
+          <p:cNvSpPr/>
+          <p:nvPr/>
+        </p:nvSpPr>
+        <p:spPr>
+          <a:xfrm>
+            <a:off x="3707892" y="4224528"/>
+            <a:ext cx="1481328" cy="896112"/>
+          </a:xfrm>
+          <a:prstGeom prst="roundRect">
+            <a:avLst>
+              <a:gd name="adj" fmla="val 10204"/>
+            </a:avLst>
+          </a:prstGeom>
+          <a:solidFill>
+            <a:srgbClr val="1E2551"/>
+          </a:solidFill>
+          <a:ln w="12700">
+            <a:solidFill>
+              <a:srgbClr val="2E3768"/>
+            </a:solidFill>
+            <a:prstDash val="solid"/>
+          </a:ln>
+        </p:spPr>
+      </p:sp>
+      <p:sp>
+        <p:nvSpPr>
+          <p:cNvPr id="17" name="Text 14"/>
+          <p:cNvSpPr/>
+          <p:nvPr/>
+        </p:nvSpPr>
+        <p:spPr>
+          <a:xfrm>
+            <a:off x="3707892" y="4224528"/>
+            <a:ext cx="1481328" cy="896112"/>
+          </a:xfrm>
+          <a:prstGeom prst="rect">
+            <a:avLst/>
+          </a:prstGeom>
+          <a:noFill/>
+          <a:ln/>
+        </p:spPr>
+        <p:txBody>
+          <a:bodyPr wrap="square" lIns="0" tIns="0" rIns="0" bIns="0" rtlCol="0" anchor="ctr"/>
+          <a:lstStyle/>
+          <a:p>
+            <a:pPr algn="ctr" indent="0" marL="0">
+              <a:lnSpc>
+                <a:spcPts val="1400"/>
+              </a:lnSpc>
+              <a:buNone/>
+            </a:pPr>
+            <a:r>
+              <a:rPr lang="en-US" sz="1150" dirty="0">
+                <a:solidFill>
+                  <a:srgbClr val="FFFFFF"/>
+                </a:solidFill>
+                <a:latin typeface="Calibri" pitchFamily="34" charset="0"/>
+                <a:ea typeface="Calibri" pitchFamily="34" charset="-122"/>
+                <a:cs typeface="Calibri" pitchFamily="34" charset="-120"/>
+              </a:rPr>
+              <a:t>Safe</a:t>
+            </a:r>
+            <a:endParaRPr lang="en-US" sz="1150" dirty="0"/>
+          </a:p>
+          <a:p>
+            <a:pPr algn="ctr" indent="0" marL="0">
+              <a:lnSpc>
+                <a:spcPts val="1400"/>
+              </a:lnSpc>
+              <a:buNone/>
+            </a:pPr>
+            <a:r>
+              <a:rPr lang="en-US" sz="1150" dirty="0">
+                <a:solidFill>
+                  <a:srgbClr val="FFFFFF"/>
+                </a:solidFill>
+                <a:latin typeface="Calibri" pitchFamily="34" charset="0"/>
+                <a:ea typeface="Calibri" pitchFamily="34" charset="-122"/>
+                <a:cs typeface="Calibri" pitchFamily="34" charset="-120"/>
+              </a:rPr>
+              <a:t>Resolution</a:t>
+            </a:r>
+            <a:endParaRPr lang="en-US" sz="1150" dirty="0"/>
+          </a:p>
+        </p:txBody>
+      </p:sp>
+      <p:sp>
+        <p:nvSpPr>
+          <p:cNvPr id="18" name="Shape 15"/>
+          <p:cNvSpPr/>
+          <p:nvPr/>
+        </p:nvSpPr>
+        <p:spPr>
+          <a:xfrm>
+            <a:off x="5353812" y="4224528"/>
+            <a:ext cx="1481328" cy="896112"/>
+          </a:xfrm>
+          <a:prstGeom prst="roundRect">
+            <a:avLst>
+              <a:gd name="adj" fmla="val 10204"/>
+            </a:avLst>
+          </a:prstGeom>
+          <a:solidFill>
+            <a:srgbClr val="1E2551"/>
+          </a:solidFill>
+          <a:ln w="12700">
+            <a:solidFill>
+              <a:srgbClr val="2E3768"/>
+            </a:solidFill>
+            <a:prstDash val="solid"/>
+          </a:ln>
+        </p:spPr>
+      </p:sp>
+      <p:sp>
+        <p:nvSpPr>
+          <p:cNvPr id="19" name="Text 16"/>
+          <p:cNvSpPr/>
+          <p:nvPr/>
+        </p:nvSpPr>
+        <p:spPr>
+          <a:xfrm>
+            <a:off x="5353812" y="4224528"/>
+            <a:ext cx="1481328" cy="896112"/>
+          </a:xfrm>
+          <a:prstGeom prst="rect">
+            <a:avLst/>
+          </a:prstGeom>
+          <a:noFill/>
+          <a:ln/>
+        </p:spPr>
+        <p:txBody>
+          <a:bodyPr wrap="square" lIns="0" tIns="0" rIns="0" bIns="0" rtlCol="0" anchor="ctr"/>
+          <a:lstStyle/>
+          <a:p>
+            <a:pPr algn="ctr" indent="0" marL="0">
+              <a:lnSpc>
+                <a:spcPts val="1400"/>
+              </a:lnSpc>
+              <a:buNone/>
+            </a:pPr>
+            <a:r>
+              <a:rPr lang="en-US" sz="1150" dirty="0">
+                <a:solidFill>
+                  <a:srgbClr val="FFFFFF"/>
+                </a:solidFill>
+                <a:latin typeface="Calibri" pitchFamily="34" charset="0"/>
+                <a:ea typeface="Calibri" pitchFamily="34" charset="-122"/>
+                <a:cs typeface="Calibri" pitchFamily="34" charset="-120"/>
+              </a:rPr>
+              <a:t>Human</a:t>
+            </a:r>
+            <a:endParaRPr lang="en-US" sz="1150" dirty="0"/>
+          </a:p>
+          <a:p>
+            <a:pPr algn="ctr" indent="0" marL="0">
+              <a:lnSpc>
+                <a:spcPts val="1400"/>
+              </a:lnSpc>
+              <a:buNone/>
+            </a:pPr>
+            <a:r>
+              <a:rPr lang="en-US" sz="1150" dirty="0">
+                <a:solidFill>
+                  <a:srgbClr val="FFFFFF"/>
+                </a:solidFill>
+                <a:latin typeface="Calibri" pitchFamily="34" charset="0"/>
+                <a:ea typeface="Calibri" pitchFamily="34" charset="-122"/>
+                <a:cs typeface="Calibri" pitchFamily="34" charset="-120"/>
+              </a:rPr>
+              <a:t>Escalation</a:t>
+            </a:r>
+            <a:endParaRPr lang="en-US" sz="1150" dirty="0"/>
+          </a:p>
+        </p:txBody>
+      </p:sp>
+      <p:sp>
+        <p:nvSpPr>
+          <p:cNvPr id="20" name="Shape 17"/>
+          <p:cNvSpPr/>
+          <p:nvPr/>
+        </p:nvSpPr>
+        <p:spPr>
+          <a:xfrm>
+            <a:off x="6999732" y="4224528"/>
+            <a:ext cx="1481328" cy="896112"/>
+          </a:xfrm>
+          <a:prstGeom prst="roundRect">
+            <a:avLst>
+              <a:gd name="adj" fmla="val 10204"/>
+            </a:avLst>
+          </a:prstGeom>
+          <a:solidFill>
+            <a:srgbClr val="1E2551"/>
+          </a:solidFill>
+          <a:ln w="12700">
+            <a:solidFill>
+              <a:srgbClr val="2E3768"/>
+            </a:solidFill>
+            <a:prstDash val="solid"/>
+          </a:ln>
+        </p:spPr>
+      </p:sp>
+      <p:sp>
+        <p:nvSpPr>
+          <p:cNvPr id="21" name="Text 18"/>
+          <p:cNvSpPr/>
+          <p:nvPr/>
+        </p:nvSpPr>
+        <p:spPr>
+          <a:xfrm>
+            <a:off x="6999732" y="4224528"/>
+            <a:ext cx="1481328" cy="896112"/>
+          </a:xfrm>
+          <a:prstGeom prst="rect">
+            <a:avLst/>
+          </a:prstGeom>
+          <a:noFill/>
+          <a:ln/>
+        </p:spPr>
+        <p:txBody>
+          <a:bodyPr wrap="square" lIns="0" tIns="0" rIns="0" bIns="0" rtlCol="0" anchor="ctr"/>
+          <a:lstStyle/>
+          <a:p>
+            <a:pPr algn="ctr" indent="0" marL="0">
+              <a:lnSpc>
+                <a:spcPts val="1400"/>
+              </a:lnSpc>
+              <a:buNone/>
+            </a:pPr>
+            <a:r>
+              <a:rPr lang="en-US" sz="1150" dirty="0">
+                <a:solidFill>
+                  <a:srgbClr val="FFFFFF"/>
+                </a:solidFill>
+                <a:latin typeface="Calibri" pitchFamily="34" charset="0"/>
+                <a:ea typeface="Calibri" pitchFamily="34" charset="-122"/>
+                <a:cs typeface="Calibri" pitchFamily="34" charset="-120"/>
+              </a:rPr>
+              <a:t>CSAT &amp;</a:t>
+            </a:r>
+            <a:endParaRPr lang="en-US" sz="1150" dirty="0"/>
+          </a:p>
+          <a:p>
+            <a:pPr algn="ctr" indent="0" marL="0">
+              <a:lnSpc>
+                <a:spcPts val="1400"/>
+              </a:lnSpc>
+              <a:buNone/>
+            </a:pPr>
+            <a:r>
+              <a:rPr lang="en-US" sz="1150" dirty="0">
+                <a:solidFill>
+                  <a:srgbClr val="FFFFFF"/>
+                </a:solidFill>
+                <a:latin typeface="Calibri" pitchFamily="34" charset="0"/>
+                <a:ea typeface="Calibri" pitchFamily="34" charset="-122"/>
+                <a:cs typeface="Calibri" pitchFamily="34" charset="-120"/>
+              </a:rPr>
+              <a:t>Knowledge</a:t>
+            </a:r>
+            <a:endParaRPr lang="en-US" sz="1150" dirty="0"/>
+          </a:p>
+        </p:txBody>
+      </p:sp>
+      <p:sp>
+        <p:nvSpPr>
+          <p:cNvPr id="22" name="Shape 19"/>
+          <p:cNvSpPr/>
+          <p:nvPr/>
+        </p:nvSpPr>
+        <p:spPr>
+          <a:xfrm>
+            <a:off x="2884932" y="2962656"/>
+            <a:ext cx="6419088" cy="0"/>
+          </a:xfrm>
+          <a:prstGeom prst="line">
+            <a:avLst/>
+          </a:prstGeom>
+          <a:noFill/>
+          <a:ln w="19050">
+            <a:solidFill>
+              <a:srgbClr val="3E4780"/>
+            </a:solidFill>
+            <a:prstDash val="solid"/>
+          </a:ln>
+        </p:spPr>
+      </p:sp>
+      <p:sp>
+        <p:nvSpPr>
+          <p:cNvPr id="23" name="Text 20"/>
+          <p:cNvSpPr/>
+          <p:nvPr/>
+        </p:nvSpPr>
+        <p:spPr>
+          <a:xfrm>
+            <a:off x="777240" y="5349240"/>
+            <a:ext cx="2880360" cy="914400"/>
+          </a:xfrm>
+          <a:prstGeom prst="rect">
+            <a:avLst/>
+          </a:prstGeom>
+          <a:noFill/>
+          <a:ln/>
+        </p:spPr>
+        <p:txBody>
+          <a:bodyPr wrap="square" lIns="0" tIns="0" rIns="0" bIns="0" rtlCol="0" anchor="ctr"/>
+          <a:lstStyle/>
+          <a:p>
+            <a:pPr indent="0" marL="0">
+              <a:buNone/>
+            </a:pPr>
+            <a:r>
+              <a:rPr lang="en-US" sz="5200" b="1" dirty="0">
+                <a:solidFill>
+                  <a:srgbClr val="FFFFFF"/>
+                </a:solidFill>
+                <a:latin typeface="Calibri" pitchFamily="34" charset="0"/>
+                <a:ea typeface="Calibri" pitchFamily="34" charset="-122"/>
+                <a:cs typeface="Calibri" pitchFamily="34" charset="-120"/>
+              </a:rPr>
+              <a:t>96</a:t>
+            </a:r>
+            <a:endParaRPr lang="en-US" sz="5200" dirty="0"/>
+          </a:p>
+        </p:txBody>
+      </p:sp>
+      <p:sp>
+        <p:nvSpPr>
+          <p:cNvPr id="24" name="Text 21"/>
+          <p:cNvSpPr/>
+          <p:nvPr/>
+        </p:nvSpPr>
+        <p:spPr>
+          <a:xfrm>
+            <a:off x="777240" y="6217920"/>
+            <a:ext cx="2880360" cy="566928"/>
+          </a:xfrm>
+          <a:prstGeom prst="rect">
+            <a:avLst/>
+          </a:prstGeom>
+          <a:noFill/>
+          <a:ln/>
+        </p:spPr>
+        <p:txBody>
+          <a:bodyPr wrap="square" lIns="0" tIns="0" rIns="0" bIns="0" rtlCol="0" anchor="ctr"/>
+          <a:lstStyle/>
+          <a:p>
+            <a:pPr indent="0" marL="0">
+              <a:buNone/>
+            </a:pPr>
+            <a:r>
+              <a:rPr lang="en-US" sz="1050" b="1" spc="100" kern="0" dirty="0">
                 <a:solidFill>
                   <a:srgbClr val="A8AECB"/>
                 </a:solidFill>
@@ -6095,21 +8604,21 @@
                 <a:ea typeface="Calibri" pitchFamily="34" charset="-122"/>
                 <a:cs typeface="Calibri" pitchFamily="34" charset="-120"/>
               </a:rPr>
-              <a:t>Triage and correlation start in parallel, reconcile, then branch three ways on the decision. All of it on Supervity Auto. The Command Center never decides anything: it reads what the agents did, ranks it, and shows which run produced it.</a:t>
-            </a:r>
-            <a:endParaRPr lang="en-US" sz="1700" dirty="0"/>
-          </a:p>
-        </p:txBody>
-      </p:sp>
-      <p:sp>
-        <p:nvSpPr>
-          <p:cNvPr id="5" name="Text 3"/>
-          <p:cNvSpPr/>
-          <p:nvPr/>
-        </p:nvSpPr>
-        <p:spPr>
-          <a:xfrm>
-            <a:off x="777240" y="4160520"/>
+              <a:t>AGENT RUNS · 97.8% SUCCESS</a:t>
+            </a:r>
+            <a:endParaRPr lang="en-US" sz="1050" dirty="0"/>
+          </a:p>
+        </p:txBody>
+      </p:sp>
+      <p:sp>
+        <p:nvSpPr>
+          <p:cNvPr id="25" name="Text 22"/>
+          <p:cNvSpPr/>
+          <p:nvPr/>
+        </p:nvSpPr>
+        <p:spPr>
+          <a:xfrm>
+            <a:off x="3931920" y="5349240"/>
             <a:ext cx="2880360" cy="914400"/>
           </a:xfrm>
           <a:prstGeom prst="rect">
@@ -6134,7 +8643,7 @@
                 <a:ea typeface="Calibri" pitchFamily="34" charset="-122"/>
                 <a:cs typeface="Calibri" pitchFamily="34" charset="-120"/>
               </a:rPr>
-              <a:t>96</a:t>
+              <a:t>8</a:t>
             </a:r>
             <a:endParaRPr lang="en-US" sz="5200" dirty="0"/>
           </a:p>
@@ -6142,13 +8651,13 @@
       </p:sp>
       <p:sp>
         <p:nvSpPr>
-          <p:cNvPr id="6" name="Text 4"/>
-          <p:cNvSpPr/>
-          <p:nvPr/>
-        </p:nvSpPr>
-        <p:spPr>
-          <a:xfrm>
-            <a:off x="777240" y="5029200"/>
+          <p:cNvPr id="26" name="Text 23"/>
+          <p:cNvSpPr/>
+          <p:nvPr/>
+        </p:nvSpPr>
+        <p:spPr>
+          <a:xfrm>
+            <a:off x="3931920" y="6217920"/>
             <a:ext cx="2880360" cy="566928"/>
           </a:xfrm>
           <a:prstGeom prst="rect">
@@ -6173,7 +8682,7 @@
                 <a:ea typeface="Calibri" pitchFamily="34" charset="-122"/>
                 <a:cs typeface="Calibri" pitchFamily="34" charset="-120"/>
               </a:rPr>
-              <a:t>AGENT RUNS · 97.8% SUCCESS</a:t>
+              <a:t>LIVE INTEGRATIONS</a:t>
             </a:r>
             <a:endParaRPr lang="en-US" sz="1050" dirty="0"/>
           </a:p>
@@ -6181,13 +8690,13 @@
       </p:sp>
       <p:sp>
         <p:nvSpPr>
-          <p:cNvPr id="7" name="Text 5"/>
-          <p:cNvSpPr/>
-          <p:nvPr/>
-        </p:nvSpPr>
-        <p:spPr>
-          <a:xfrm>
-            <a:off x="3931920" y="4160520"/>
+          <p:cNvPr id="27" name="Text 24"/>
+          <p:cNvSpPr/>
+          <p:nvPr/>
+        </p:nvSpPr>
+        <p:spPr>
+          <a:xfrm>
+            <a:off x="7086600" y="5349240"/>
             <a:ext cx="2880360" cy="914400"/>
           </a:xfrm>
           <a:prstGeom prst="rect">
@@ -6206,13 +8715,13 @@
             <a:r>
               <a:rPr lang="en-US" sz="5200" b="1" dirty="0">
                 <a:solidFill>
-                  <a:srgbClr val="FFFFFF"/>
-                </a:solidFill>
-                <a:latin typeface="Calibri" pitchFamily="34" charset="0"/>
-                <a:ea typeface="Calibri" pitchFamily="34" charset="-122"/>
-                <a:cs typeface="Calibri" pitchFamily="34" charset="-120"/>
-              </a:rPr>
-              <a:t>8</a:t>
+                  <a:srgbClr val="8AA2DF"/>
+                </a:solidFill>
+                <a:latin typeface="Calibri" pitchFamily="34" charset="0"/>
+                <a:ea typeface="Calibri" pitchFamily="34" charset="-122"/>
+                <a:cs typeface="Calibri" pitchFamily="34" charset="-120"/>
+              </a:rPr>
+              <a:t>0</a:t>
             </a:r>
             <a:endParaRPr lang="en-US" sz="5200" dirty="0"/>
           </a:p>
@@ -6220,13 +8729,13 @@
       </p:sp>
       <p:sp>
         <p:nvSpPr>
-          <p:cNvPr id="8" name="Text 6"/>
-          <p:cNvSpPr/>
-          <p:nvPr/>
-        </p:nvSpPr>
-        <p:spPr>
-          <a:xfrm>
-            <a:off x="3931920" y="5029200"/>
+          <p:cNvPr id="28" name="Text 25"/>
+          <p:cNvSpPr/>
+          <p:nvPr/>
+        </p:nvSpPr>
+        <p:spPr>
+          <a:xfrm>
+            <a:off x="7086600" y="6217920"/>
             <a:ext cx="2880360" cy="566928"/>
           </a:xfrm>
           <a:prstGeom prst="rect">
@@ -6251,7 +8760,7 @@
                 <a:ea typeface="Calibri" pitchFamily="34" charset="-122"/>
                 <a:cs typeface="Calibri" pitchFamily="34" charset="-120"/>
               </a:rPr>
-              <a:t>LIVE INTEGRATIONS</a:t>
+              <a:t>AGENT LOGIC IN OUR CODEBASE</a:t>
             </a:r>
             <a:endParaRPr lang="en-US" sz="1050" dirty="0"/>
           </a:p>
@@ -6259,91 +8768,13 @@
       </p:sp>
       <p:sp>
         <p:nvSpPr>
-          <p:cNvPr id="9" name="Text 7"/>
-          <p:cNvSpPr/>
-          <p:nvPr/>
-        </p:nvSpPr>
-        <p:spPr>
-          <a:xfrm>
-            <a:off x="7086600" y="4160520"/>
-            <a:ext cx="2880360" cy="914400"/>
-          </a:xfrm>
-          <a:prstGeom prst="rect">
-            <a:avLst/>
-          </a:prstGeom>
-          <a:noFill/>
-          <a:ln/>
-        </p:spPr>
-        <p:txBody>
-          <a:bodyPr wrap="square" lIns="0" tIns="0" rIns="0" bIns="0" rtlCol="0" anchor="ctr"/>
-          <a:lstStyle/>
-          <a:p>
-            <a:pPr indent="0" marL="0">
-              <a:buNone/>
-            </a:pPr>
-            <a:r>
-              <a:rPr lang="en-US" sz="5200" b="1" dirty="0">
-                <a:solidFill>
-                  <a:srgbClr val="8AA2DF"/>
-                </a:solidFill>
-                <a:latin typeface="Calibri" pitchFamily="34" charset="0"/>
-                <a:ea typeface="Calibri" pitchFamily="34" charset="-122"/>
-                <a:cs typeface="Calibri" pitchFamily="34" charset="-120"/>
-              </a:rPr>
-              <a:t>0</a:t>
-            </a:r>
-            <a:endParaRPr lang="en-US" sz="5200" dirty="0"/>
-          </a:p>
-        </p:txBody>
-      </p:sp>
-      <p:sp>
-        <p:nvSpPr>
-          <p:cNvPr id="10" name="Text 8"/>
-          <p:cNvSpPr/>
-          <p:nvPr/>
-        </p:nvSpPr>
-        <p:spPr>
-          <a:xfrm>
-            <a:off x="7086600" y="5029200"/>
-            <a:ext cx="2880360" cy="566928"/>
-          </a:xfrm>
-          <a:prstGeom prst="rect">
-            <a:avLst/>
-          </a:prstGeom>
-          <a:noFill/>
-          <a:ln/>
-        </p:spPr>
-        <p:txBody>
-          <a:bodyPr wrap="square" lIns="0" tIns="0" rIns="0" bIns="0" rtlCol="0" anchor="ctr"/>
-          <a:lstStyle/>
-          <a:p>
-            <a:pPr indent="0" marL="0">
-              <a:buNone/>
-            </a:pPr>
-            <a:r>
-              <a:rPr lang="en-US" sz="1050" b="1" spc="100" kern="0" dirty="0">
-                <a:solidFill>
-                  <a:srgbClr val="A8AECB"/>
-                </a:solidFill>
-                <a:latin typeface="Calibri" pitchFamily="34" charset="0"/>
-                <a:ea typeface="Calibri" pitchFamily="34" charset="-122"/>
-                <a:cs typeface="Calibri" pitchFamily="34" charset="-120"/>
-              </a:rPr>
-              <a:t>AGENT LOGIC IN OUR CODEBASE</a:t>
-            </a:r>
-            <a:endParaRPr lang="en-US" sz="1050" dirty="0"/>
-          </a:p>
-        </p:txBody>
-      </p:sp>
-      <p:sp>
-        <p:nvSpPr>
-          <p:cNvPr id="12" name="Text 9"/>
-          <p:cNvSpPr/>
-          <p:nvPr/>
-        </p:nvSpPr>
-        <p:spPr>
-          <a:xfrm>
-            <a:off x="11155680" y="6172200"/>
+          <p:cNvPr id="30" name="Text 26"/>
+          <p:cNvSpPr/>
+          <p:nvPr/>
+        </p:nvSpPr>
+        <p:spPr>
+          <a:xfrm>
+            <a:off x="11247120" y="6263640"/>
             <a:ext cx="457200" cy="274320"/>
           </a:xfrm>
           <a:prstGeom prst="rect">

--- a/docs/Service-Desk-Command-Center.pptx
+++ b/docs/Service-Desk-Command-Center.pptx
@@ -6848,7 +6848,7 @@
                 <a:ea typeface="Calibri" pitchFamily="34" charset="-122"/>
                 <a:cs typeface="Calibri" pitchFamily="34" charset="-120"/>
               </a:rPr>
-              <a:t>9,752</a:t>
+              <a:t>13,822</a:t>
             </a:r>
             <a:endParaRPr lang="en-US" sz="5200" dirty="0"/>
           </a:p>
@@ -8565,7 +8565,7 @@
                 <a:ea typeface="Calibri" pitchFamily="34" charset="-122"/>
                 <a:cs typeface="Calibri" pitchFamily="34" charset="-120"/>
               </a:rPr>
-              <a:t>96</a:t>
+              <a:t>137</a:t>
             </a:r>
             <a:endParaRPr lang="en-US" sz="5200" dirty="0"/>
           </a:p>
@@ -8604,7 +8604,7 @@
                 <a:ea typeface="Calibri" pitchFamily="34" charset="-122"/>
                 <a:cs typeface="Calibri" pitchFamily="34" charset="-120"/>
               </a:rPr>
-              <a:t>AGENT RUNS · 97.8% SUCCESS</a:t>
+              <a:t>AGENT RUNS · 98.5% SUCCESS</a:t>
             </a:r>
             <a:endParaRPr lang="en-US" sz="1050" dirty="0"/>
           </a:p>

--- a/docs/Service-Desk-Command-Center.pptx
+++ b/docs/Service-Desk-Command-Center.pptx
@@ -5498,7 +5498,7 @@
                 <a:ea typeface="Calibri" pitchFamily="34" charset="-122"/>
                 <a:cs typeface="Calibri" pitchFamily="34" charset="-120"/>
               </a:rPr>
-              <a:t>75</a:t>
+              <a:t>40</a:t>
             </a:r>
             <a:endParaRPr lang="en-US" sz="5000" dirty="0"/>
           </a:p>
@@ -6848,7 +6848,7 @@
                 <a:ea typeface="Calibri" pitchFamily="34" charset="-122"/>
                 <a:cs typeface="Calibri" pitchFamily="34" charset="-120"/>
               </a:rPr>
-              <a:t>13,822</a:t>
+              <a:t>15,294</a:t>
             </a:r>
             <a:endParaRPr lang="en-US" sz="5200" dirty="0"/>
           </a:p>
@@ -8565,7 +8565,7 @@
                 <a:ea typeface="Calibri" pitchFamily="34" charset="-122"/>
                 <a:cs typeface="Calibri" pitchFamily="34" charset="-120"/>
               </a:rPr>
-              <a:t>137</a:t>
+              <a:t>288</a:t>
             </a:r>
             <a:endParaRPr lang="en-US" sz="5200" dirty="0"/>
           </a:p>
@@ -8604,7 +8604,7 @@
                 <a:ea typeface="Calibri" pitchFamily="34" charset="-122"/>
                 <a:cs typeface="Calibri" pitchFamily="34" charset="-120"/>
               </a:rPr>
-              <a:t>AGENT RUNS · 98.5% SUCCESS</a:t>
+              <a:t>AGENT RUNS · 99.3% SUCCESS</a:t>
             </a:r>
             <a:endParaRPr lang="en-US" sz="1050" dirty="0"/>
           </a:p>

--- a/docs/Service-Desk-Command-Center.pptx
+++ b/docs/Service-Desk-Command-Center.pptx
@@ -1013,7 +1013,7 @@
           <a:p>
             <a:r>
               <a:rPr lang="en-US" dirty="0"/>
-              <a:t>End on 380. Do not add anything after this.</a:t>
+              <a:t>End on 417. Do not add anything after this.</a:t>
             </a:r>
             <a:endParaRPr lang="en-US" dirty="0"/>
           </a:p>
@@ -2313,7 +2313,7 @@
                 <a:ea typeface="Calibri" pitchFamily="34" charset="-122"/>
                 <a:cs typeface="Calibri" pitchFamily="34" charset="-120"/>
               </a:rPr>
-              <a:t>380</a:t>
+              <a:t>417</a:t>
             </a:r>
             <a:endParaRPr lang="en-US" sz="5200" dirty="0"/>
           </a:p>
@@ -3416,7 +3416,7 @@
                 <a:ea typeface="Calibri" pitchFamily="34" charset="-122"/>
                 <a:cs typeface="Calibri" pitchFamily="34" charset="-120"/>
               </a:rPr>
-              <a:t>380</a:t>
+              <a:t>417</a:t>
             </a:r>
             <a:endParaRPr lang="en-US" sz="5200" dirty="0"/>
           </a:p>
@@ -5599,7 +5599,7 @@
                 <a:ea typeface="Calibri" pitchFamily="34" charset="-122"/>
                 <a:cs typeface="Calibri" pitchFamily="34" charset="-120"/>
               </a:rPr>
-              <a:t>380</a:t>
+              <a:t>417</a:t>
             </a:r>
             <a:endParaRPr lang="en-US" sz="5000" dirty="0"/>
           </a:p>
@@ -7004,7 +7004,7 @@
                 <a:ea typeface="Calibri" pitchFamily="34" charset="-122"/>
                 <a:cs typeface="Calibri" pitchFamily="34" charset="-120"/>
               </a:rPr>
-              <a:t>176</a:t>
+              <a:t>36</a:t>
             </a:r>
             <a:endParaRPr lang="en-US" sz="5200" dirty="0"/>
           </a:p>
